--- a/VLSI design 설계 실습/2025-04-09.pptx
+++ b/VLSI design 설계 실습/2025-04-09.pptx
@@ -7,31 +7,33 @@
   <p:sldIdLst>
     <p:sldId id="256" r:id="rId2"/>
     <p:sldId id="258" r:id="rId3"/>
-    <p:sldId id="261" r:id="rId4"/>
-    <p:sldId id="257" r:id="rId5"/>
-    <p:sldId id="259" r:id="rId6"/>
-    <p:sldId id="260" r:id="rId7"/>
-    <p:sldId id="262" r:id="rId8"/>
-    <p:sldId id="263" r:id="rId9"/>
-    <p:sldId id="264" r:id="rId10"/>
-    <p:sldId id="270" r:id="rId11"/>
-    <p:sldId id="269" r:id="rId12"/>
-    <p:sldId id="265" r:id="rId13"/>
-    <p:sldId id="268" r:id="rId14"/>
-    <p:sldId id="266" r:id="rId15"/>
-    <p:sldId id="267" r:id="rId16"/>
-    <p:sldId id="271" r:id="rId17"/>
-    <p:sldId id="272" r:id="rId18"/>
-    <p:sldId id="273" r:id="rId19"/>
-    <p:sldId id="274" r:id="rId20"/>
-    <p:sldId id="275" r:id="rId21"/>
-    <p:sldId id="279" r:id="rId22"/>
-    <p:sldId id="276" r:id="rId23"/>
-    <p:sldId id="278" r:id="rId24"/>
-    <p:sldId id="277" r:id="rId25"/>
-    <p:sldId id="280" r:id="rId26"/>
-    <p:sldId id="281" r:id="rId27"/>
-    <p:sldId id="283" r:id="rId28"/>
+    <p:sldId id="284" r:id="rId4"/>
+    <p:sldId id="261" r:id="rId5"/>
+    <p:sldId id="257" r:id="rId6"/>
+    <p:sldId id="259" r:id="rId7"/>
+    <p:sldId id="285" r:id="rId8"/>
+    <p:sldId id="260" r:id="rId9"/>
+    <p:sldId id="262" r:id="rId10"/>
+    <p:sldId id="263" r:id="rId11"/>
+    <p:sldId id="264" r:id="rId12"/>
+    <p:sldId id="270" r:id="rId13"/>
+    <p:sldId id="269" r:id="rId14"/>
+    <p:sldId id="265" r:id="rId15"/>
+    <p:sldId id="268" r:id="rId16"/>
+    <p:sldId id="266" r:id="rId17"/>
+    <p:sldId id="267" r:id="rId18"/>
+    <p:sldId id="271" r:id="rId19"/>
+    <p:sldId id="272" r:id="rId20"/>
+    <p:sldId id="273" r:id="rId21"/>
+    <p:sldId id="274" r:id="rId22"/>
+    <p:sldId id="275" r:id="rId23"/>
+    <p:sldId id="279" r:id="rId24"/>
+    <p:sldId id="276" r:id="rId25"/>
+    <p:sldId id="278" r:id="rId26"/>
+    <p:sldId id="277" r:id="rId27"/>
+    <p:sldId id="280" r:id="rId28"/>
+    <p:sldId id="281" r:id="rId29"/>
+    <p:sldId id="283" r:id="rId30"/>
   </p:sldIdLst>
   <p:sldSz cx="12192000" cy="6858000"/>
   <p:notesSz cx="6858000" cy="9144000"/>
@@ -267,7 +269,7 @@
           <a:p>
             <a:fld id="{E7D6A624-96E8-4A6F-86ED-6696C83CB811}" type="datetimeFigureOut">
               <a:rPr lang="ko-KR" altLang="en-US" smtClean="0"/>
-              <a:t>2025-06-14</a:t>
+              <a:t>2025-06-18</a:t>
             </a:fld>
             <a:endParaRPr lang="ko-KR" altLang="en-US"/>
           </a:p>
@@ -435,7 +437,7 @@
           <a:p>
             <a:fld id="{E7D6A624-96E8-4A6F-86ED-6696C83CB811}" type="datetimeFigureOut">
               <a:rPr lang="ko-KR" altLang="en-US" smtClean="0"/>
-              <a:t>2025-06-14</a:t>
+              <a:t>2025-06-18</a:t>
             </a:fld>
             <a:endParaRPr lang="ko-KR" altLang="en-US"/>
           </a:p>
@@ -613,7 +615,7 @@
           <a:p>
             <a:fld id="{E7D6A624-96E8-4A6F-86ED-6696C83CB811}" type="datetimeFigureOut">
               <a:rPr lang="ko-KR" altLang="en-US" smtClean="0"/>
-              <a:t>2025-06-14</a:t>
+              <a:t>2025-06-18</a:t>
             </a:fld>
             <a:endParaRPr lang="ko-KR" altLang="en-US"/>
           </a:p>
@@ -781,7 +783,7 @@
           <a:p>
             <a:fld id="{E7D6A624-96E8-4A6F-86ED-6696C83CB811}" type="datetimeFigureOut">
               <a:rPr lang="ko-KR" altLang="en-US" smtClean="0"/>
-              <a:t>2025-06-14</a:t>
+              <a:t>2025-06-18</a:t>
             </a:fld>
             <a:endParaRPr lang="ko-KR" altLang="en-US"/>
           </a:p>
@@ -1026,7 +1028,7 @@
           <a:p>
             <a:fld id="{E7D6A624-96E8-4A6F-86ED-6696C83CB811}" type="datetimeFigureOut">
               <a:rPr lang="ko-KR" altLang="en-US" smtClean="0"/>
-              <a:t>2025-06-14</a:t>
+              <a:t>2025-06-18</a:t>
             </a:fld>
             <a:endParaRPr lang="ko-KR" altLang="en-US"/>
           </a:p>
@@ -1255,7 +1257,7 @@
           <a:p>
             <a:fld id="{E7D6A624-96E8-4A6F-86ED-6696C83CB811}" type="datetimeFigureOut">
               <a:rPr lang="ko-KR" altLang="en-US" smtClean="0"/>
-              <a:t>2025-06-14</a:t>
+              <a:t>2025-06-18</a:t>
             </a:fld>
             <a:endParaRPr lang="ko-KR" altLang="en-US"/>
           </a:p>
@@ -1619,7 +1621,7 @@
           <a:p>
             <a:fld id="{E7D6A624-96E8-4A6F-86ED-6696C83CB811}" type="datetimeFigureOut">
               <a:rPr lang="ko-KR" altLang="en-US" smtClean="0"/>
-              <a:t>2025-06-14</a:t>
+              <a:t>2025-06-18</a:t>
             </a:fld>
             <a:endParaRPr lang="ko-KR" altLang="en-US"/>
           </a:p>
@@ -1736,7 +1738,7 @@
           <a:p>
             <a:fld id="{E7D6A624-96E8-4A6F-86ED-6696C83CB811}" type="datetimeFigureOut">
               <a:rPr lang="ko-KR" altLang="en-US" smtClean="0"/>
-              <a:t>2025-06-14</a:t>
+              <a:t>2025-06-18</a:t>
             </a:fld>
             <a:endParaRPr lang="ko-KR" altLang="en-US"/>
           </a:p>
@@ -1831,7 +1833,7 @@
           <a:p>
             <a:fld id="{E7D6A624-96E8-4A6F-86ED-6696C83CB811}" type="datetimeFigureOut">
               <a:rPr lang="ko-KR" altLang="en-US" smtClean="0"/>
-              <a:t>2025-06-14</a:t>
+              <a:t>2025-06-18</a:t>
             </a:fld>
             <a:endParaRPr lang="ko-KR" altLang="en-US"/>
           </a:p>
@@ -2106,7 +2108,7 @@
           <a:p>
             <a:fld id="{E7D6A624-96E8-4A6F-86ED-6696C83CB811}" type="datetimeFigureOut">
               <a:rPr lang="ko-KR" altLang="en-US" smtClean="0"/>
-              <a:t>2025-06-14</a:t>
+              <a:t>2025-06-18</a:t>
             </a:fld>
             <a:endParaRPr lang="ko-KR" altLang="en-US"/>
           </a:p>
@@ -2358,7 +2360,7 @@
           <a:p>
             <a:fld id="{E7D6A624-96E8-4A6F-86ED-6696C83CB811}" type="datetimeFigureOut">
               <a:rPr lang="ko-KR" altLang="en-US" smtClean="0"/>
-              <a:t>2025-06-14</a:t>
+              <a:t>2025-06-18</a:t>
             </a:fld>
             <a:endParaRPr lang="ko-KR" altLang="en-US"/>
           </a:p>
@@ -2575,7 +2577,7 @@
           <a:p>
             <a:fld id="{E7D6A624-96E8-4A6F-86ED-6696C83CB811}" type="datetimeFigureOut">
               <a:rPr lang="ko-KR" altLang="en-US" smtClean="0"/>
-              <a:t>2025-06-14</a:t>
+              <a:t>2025-06-18</a:t>
             </a:fld>
             <a:endParaRPr lang="ko-KR" altLang="en-US"/>
           </a:p>
@@ -3080,6 +3082,371 @@
           <a:p>
             <a:r>
               <a:rPr lang="en-US" altLang="ko-KR" dirty="0"/>
+              <a:t>CMOS-</a:t>
+            </a:r>
+            <a:r>
+              <a:rPr lang="ko-KR" altLang="en-US" dirty="0" err="1"/>
+              <a:t>동작점</a:t>
+            </a:r>
+            <a:endParaRPr lang="ko-KR" altLang="en-US" dirty="0"/>
+          </a:p>
+        </p:txBody>
+      </p:sp>
+      <p:sp>
+        <p:nvSpPr>
+          <p:cNvPr id="3" name="내용 개체 틀 2"/>
+          <p:cNvSpPr>
+            <a:spLocks noGrp="1"/>
+          </p:cNvSpPr>
+          <p:nvPr>
+            <p:ph idx="1"/>
+          </p:nvPr>
+        </p:nvSpPr>
+        <p:spPr/>
+        <p:txBody>
+          <a:bodyPr/>
+          <a:lstStyle/>
+          <a:p>
+            <a:r>
+              <a:rPr lang="en-US" altLang="ko-KR" dirty="0"/>
+              <a:t>CMOS </a:t>
+            </a:r>
+            <a:r>
+              <a:rPr lang="ko-KR" altLang="en-US" dirty="0"/>
+              <a:t>회로에서 동작점이란</a:t>
+            </a:r>
+            <a:r>
+              <a:rPr lang="en-US" altLang="ko-KR" dirty="0"/>
+              <a:t>, DC </a:t>
+            </a:r>
+            <a:r>
+              <a:rPr lang="ko-KR" altLang="en-US" dirty="0"/>
+              <a:t>바이어스에서 전압</a:t>
+            </a:r>
+            <a:r>
+              <a:rPr lang="en-US" altLang="ko-KR" dirty="0"/>
+              <a:t>, </a:t>
+            </a:r>
+            <a:r>
+              <a:rPr lang="ko-KR" altLang="en-US" dirty="0"/>
+              <a:t>전류가 안정되어 있는 상태를 나타내는 지점을 의미한다</a:t>
+            </a:r>
+            <a:r>
+              <a:rPr lang="en-US" altLang="ko-KR" dirty="0"/>
+              <a:t>.</a:t>
+            </a:r>
+          </a:p>
+          <a:p>
+            <a:r>
+              <a:rPr lang="ko-KR" altLang="en-US" dirty="0"/>
+              <a:t>회로 내 동작점은 회로의 안정성</a:t>
+            </a:r>
+            <a:r>
+              <a:rPr lang="en-US" altLang="ko-KR" dirty="0"/>
+              <a:t>, </a:t>
+            </a:r>
+            <a:r>
+              <a:rPr lang="ko-KR" altLang="en-US" dirty="0"/>
+              <a:t>증폭 기능 작동 여부</a:t>
+            </a:r>
+            <a:r>
+              <a:rPr lang="en-US" altLang="ko-KR" dirty="0"/>
+              <a:t>, </a:t>
+            </a:r>
+            <a:r>
+              <a:rPr lang="ko-KR" altLang="en-US" dirty="0" err="1"/>
+              <a:t>스위칭</a:t>
+            </a:r>
+            <a:r>
+              <a:rPr lang="ko-KR" altLang="en-US" dirty="0"/>
+              <a:t> 능력을 판단하는 데 중요한 역할을 한다</a:t>
+            </a:r>
+            <a:r>
+              <a:rPr lang="en-US" altLang="ko-KR" dirty="0"/>
+              <a:t>.</a:t>
+            </a:r>
+            <a:endParaRPr lang="ko-KR" altLang="en-US" dirty="0"/>
+          </a:p>
+        </p:txBody>
+      </p:sp>
+    </p:spTree>
+    <p:extLst>
+      <p:ext uri="{BB962C8B-B14F-4D97-AF65-F5344CB8AC3E}">
+        <p14:creationId xmlns:p14="http://schemas.microsoft.com/office/powerpoint/2010/main" val="3765166383"/>
+      </p:ext>
+    </p:extLst>
+  </p:cSld>
+  <p:clrMapOvr>
+    <a:masterClrMapping/>
+  </p:clrMapOvr>
+</p:sld>
+</file>
+
+<file path=ppt/slides/slide11.xml><?xml version="1.0" encoding="utf-8"?>
+<p:sld xmlns:a="http://schemas.openxmlformats.org/drawingml/2006/main" xmlns:r="http://schemas.openxmlformats.org/officeDocument/2006/relationships" xmlns:p="http://schemas.openxmlformats.org/presentationml/2006/main">
+  <p:cSld>
+    <p:spTree>
+      <p:nvGrpSpPr>
+        <p:cNvPr id="1" name=""/>
+        <p:cNvGrpSpPr/>
+        <p:nvPr/>
+      </p:nvGrpSpPr>
+      <p:grpSpPr>
+        <a:xfrm>
+          <a:off x="0" y="0"/>
+          <a:ext cx="0" cy="0"/>
+          <a:chOff x="0" y="0"/>
+          <a:chExt cx="0" cy="0"/>
+        </a:xfrm>
+      </p:grpSpPr>
+      <p:sp>
+        <p:nvSpPr>
+          <p:cNvPr id="2" name="제목 1"/>
+          <p:cNvSpPr>
+            <a:spLocks noGrp="1"/>
+          </p:cNvSpPr>
+          <p:nvPr>
+            <p:ph type="title"/>
+          </p:nvPr>
+        </p:nvSpPr>
+        <p:spPr/>
+        <p:txBody>
+          <a:bodyPr/>
+          <a:lstStyle/>
+          <a:p>
+            <a:r>
+              <a:rPr lang="en-US" altLang="ko-KR" dirty="0"/>
+              <a:t>CMOS</a:t>
+            </a:r>
+            <a:r>
+              <a:rPr lang="ko-KR" altLang="en-US" dirty="0"/>
+              <a:t>에서 </a:t>
+            </a:r>
+            <a:r>
+              <a:rPr lang="ko-KR" altLang="en-US" dirty="0" err="1"/>
+              <a:t>동작점을</a:t>
+            </a:r>
+            <a:r>
+              <a:rPr lang="ko-KR" altLang="en-US" dirty="0"/>
+              <a:t> 먼저 확인하는 이유</a:t>
+            </a:r>
+          </a:p>
+        </p:txBody>
+      </p:sp>
+      <p:sp>
+        <p:nvSpPr>
+          <p:cNvPr id="3" name="내용 개체 틀 2"/>
+          <p:cNvSpPr>
+            <a:spLocks noGrp="1"/>
+          </p:cNvSpPr>
+          <p:nvPr>
+            <p:ph idx="1"/>
+          </p:nvPr>
+        </p:nvSpPr>
+        <p:spPr/>
+        <p:txBody>
+          <a:bodyPr>
+            <a:normAutofit/>
+          </a:bodyPr>
+          <a:lstStyle/>
+          <a:p>
+            <a:r>
+              <a:rPr lang="en-US" altLang="ko-KR" sz="2000" dirty="0"/>
+              <a:t>CMOS </a:t>
+            </a:r>
+            <a:r>
+              <a:rPr lang="ko-KR" altLang="en-US" sz="2000" dirty="0"/>
+              <a:t>회로에서 </a:t>
+            </a:r>
+            <a:r>
+              <a:rPr lang="ko-KR" altLang="en-US" sz="2000" dirty="0" err="1"/>
+              <a:t>동작점을</a:t>
+            </a:r>
+            <a:r>
+              <a:rPr lang="ko-KR" altLang="en-US" sz="2000" dirty="0"/>
+              <a:t> 먼저 확인하고 시뮬레이션을 진행하는 이유는 </a:t>
+            </a:r>
+            <a:r>
+              <a:rPr lang="ko-KR" altLang="en-US" sz="2000" dirty="0" err="1"/>
+              <a:t>동작점이</a:t>
+            </a:r>
+            <a:r>
+              <a:rPr lang="ko-KR" altLang="en-US" sz="2000" dirty="0"/>
+              <a:t> 회로의 정상적인 동작을 이해하고 분석하는 데 중요한 역할을 하기 때문이다</a:t>
+            </a:r>
+            <a:r>
+              <a:rPr lang="en-US" altLang="ko-KR" sz="2000" dirty="0"/>
+              <a:t>.</a:t>
+            </a:r>
+          </a:p>
+          <a:p>
+            <a:r>
+              <a:rPr lang="en-US" altLang="ko-KR" sz="2000" dirty="0"/>
+              <a:t>CMOS </a:t>
+            </a:r>
+            <a:r>
+              <a:rPr lang="ko-KR" altLang="en-US" sz="2000" dirty="0"/>
+              <a:t>트랜지스터는 크게 세 가지 동작 영역</a:t>
+            </a:r>
+            <a:r>
+              <a:rPr lang="en-US" altLang="ko-KR" sz="2000" dirty="0"/>
+              <a:t>(</a:t>
+            </a:r>
+            <a:r>
+              <a:rPr lang="ko-KR" altLang="en-US" sz="2000" dirty="0"/>
+              <a:t>차단 영역</a:t>
+            </a:r>
+            <a:r>
+              <a:rPr lang="en-US" altLang="ko-KR" sz="2000" dirty="0"/>
+              <a:t>, </a:t>
+            </a:r>
+            <a:r>
+              <a:rPr lang="ko-KR" altLang="en-US" sz="2000" dirty="0"/>
+              <a:t>선형 영역</a:t>
+            </a:r>
+            <a:r>
+              <a:rPr lang="en-US" altLang="ko-KR" sz="2000" dirty="0"/>
+              <a:t>, </a:t>
+            </a:r>
+            <a:r>
+              <a:rPr lang="ko-KR" altLang="en-US" sz="2000" dirty="0"/>
+              <a:t>포화 영역</a:t>
+            </a:r>
+            <a:r>
+              <a:rPr lang="en-US" altLang="ko-KR" sz="2000" dirty="0"/>
+              <a:t>)</a:t>
+            </a:r>
+            <a:r>
+              <a:rPr lang="ko-KR" altLang="en-US" sz="2000" dirty="0"/>
+              <a:t>으로 나눠지며</a:t>
+            </a:r>
+            <a:r>
+              <a:rPr lang="en-US" altLang="ko-KR" sz="2000" dirty="0"/>
+              <a:t>, </a:t>
+            </a:r>
+            <a:r>
+              <a:rPr lang="ko-KR" altLang="en-US" sz="2000" dirty="0"/>
+              <a:t>각 트랜지스터가 어떤 영역에서 동작하는지 파악하는 것이 중요하다</a:t>
+            </a:r>
+            <a:r>
+              <a:rPr lang="en-US" altLang="ko-KR" sz="2000" dirty="0"/>
+              <a:t>. </a:t>
+            </a:r>
+            <a:r>
+              <a:rPr lang="ko-KR" altLang="en-US" sz="2000" dirty="0" err="1"/>
+              <a:t>동작점을</a:t>
+            </a:r>
+            <a:r>
+              <a:rPr lang="ko-KR" altLang="en-US" sz="2000" dirty="0"/>
+              <a:t> 확인하면 트랜지스터가 의도한 대로 작동하는지 확인할 수 있다</a:t>
+            </a:r>
+            <a:r>
+              <a:rPr lang="en-US" altLang="ko-KR" sz="2000" dirty="0"/>
+              <a:t>.</a:t>
+            </a:r>
+          </a:p>
+          <a:p>
+            <a:r>
+              <a:rPr lang="en-US" altLang="ko-KR" sz="2000" dirty="0"/>
+              <a:t>CMOS </a:t>
+            </a:r>
+            <a:r>
+              <a:rPr lang="ko-KR" altLang="en-US" sz="2000" dirty="0"/>
+              <a:t>회로에서 트랜지스터는 일반적으로 바이어스 전압을 통해 특정 </a:t>
+            </a:r>
+            <a:r>
+              <a:rPr lang="ko-KR" altLang="en-US" sz="2000" dirty="0" err="1"/>
+              <a:t>동작점을</a:t>
+            </a:r>
+            <a:r>
+              <a:rPr lang="ko-KR" altLang="en-US" sz="2000" dirty="0"/>
+              <a:t> 설정한다</a:t>
+            </a:r>
+            <a:r>
+              <a:rPr lang="en-US" altLang="ko-KR" sz="2000" dirty="0"/>
+              <a:t>.. </a:t>
+            </a:r>
+            <a:r>
+              <a:rPr lang="ko-KR" altLang="en-US" sz="2000" dirty="0"/>
+              <a:t>바이어스가 적절히 설정되지 않으면 회로가 제대로 동작하지 않거나</a:t>
+            </a:r>
+            <a:r>
+              <a:rPr lang="en-US" altLang="ko-KR" sz="2000" dirty="0"/>
+              <a:t>, </a:t>
+            </a:r>
+            <a:r>
+              <a:rPr lang="ko-KR" altLang="en-US" sz="2000" dirty="0"/>
+              <a:t>왜곡이 발생할 수 있기 때문에</a:t>
+            </a:r>
+            <a:r>
+              <a:rPr lang="en-US" altLang="ko-KR" sz="2000" dirty="0"/>
+              <a:t> </a:t>
+            </a:r>
+            <a:r>
+              <a:rPr lang="ko-KR" altLang="en-US" sz="2000" dirty="0" err="1"/>
+              <a:t>동작점을</a:t>
+            </a:r>
+            <a:r>
+              <a:rPr lang="ko-KR" altLang="en-US" sz="2000" dirty="0"/>
+              <a:t> 확인하여 바이어스 전압이 적절한지 검증하는 것이 중요하다</a:t>
+            </a:r>
+            <a:r>
+              <a:rPr lang="en-US" altLang="ko-KR" sz="2000" dirty="0"/>
+              <a:t>.</a:t>
+            </a:r>
+          </a:p>
+          <a:p>
+            <a:endParaRPr lang="ko-KR" altLang="en-US" sz="1600" dirty="0"/>
+          </a:p>
+        </p:txBody>
+      </p:sp>
+    </p:spTree>
+    <p:extLst>
+      <p:ext uri="{BB962C8B-B14F-4D97-AF65-F5344CB8AC3E}">
+        <p14:creationId xmlns:p14="http://schemas.microsoft.com/office/powerpoint/2010/main" val="2727140261"/>
+      </p:ext>
+    </p:extLst>
+  </p:cSld>
+  <p:clrMapOvr>
+    <a:masterClrMapping/>
+  </p:clrMapOvr>
+</p:sld>
+</file>
+
+<file path=ppt/slides/slide12.xml><?xml version="1.0" encoding="utf-8"?>
+<p:sld xmlns:a="http://schemas.openxmlformats.org/drawingml/2006/main" xmlns:r="http://schemas.openxmlformats.org/officeDocument/2006/relationships" xmlns:p="http://schemas.openxmlformats.org/presentationml/2006/main">
+  <p:cSld>
+    <p:spTree>
+      <p:nvGrpSpPr>
+        <p:cNvPr id="1" name=""/>
+        <p:cNvGrpSpPr/>
+        <p:nvPr/>
+      </p:nvGrpSpPr>
+      <p:grpSpPr>
+        <a:xfrm>
+          <a:off x="0" y="0"/>
+          <a:ext cx="0" cy="0"/>
+          <a:chOff x="0" y="0"/>
+          <a:chExt cx="0" cy="0"/>
+        </a:xfrm>
+      </p:grpSpPr>
+      <p:sp>
+        <p:nvSpPr>
+          <p:cNvPr id="2" name="제목 1"/>
+          <p:cNvSpPr>
+            <a:spLocks noGrp="1"/>
+          </p:cNvSpPr>
+          <p:nvPr>
+            <p:ph type="title"/>
+          </p:nvPr>
+        </p:nvSpPr>
+        <p:spPr/>
+        <p:txBody>
+          <a:bodyPr/>
+          <a:lstStyle/>
+          <a:p>
+            <a:r>
+              <a:rPr lang="en-US" altLang="ko-KR" dirty="0"/>
               <a:t>CMOS DC </a:t>
             </a:r>
             <a:r>
@@ -3128,7 +3495,7 @@
 </p:sld>
 </file>
 
-<file path=ppt/slides/slide11.xml><?xml version="1.0" encoding="utf-8"?>
+<file path=ppt/slides/slide13.xml><?xml version="1.0" encoding="utf-8"?>
 <p:sld xmlns:a="http://schemas.openxmlformats.org/drawingml/2006/main" xmlns:r="http://schemas.openxmlformats.org/officeDocument/2006/relationships" xmlns:p="http://schemas.openxmlformats.org/presentationml/2006/main">
   <p:cSld>
     <p:spTree>
@@ -3321,7 +3688,7 @@
 </p:sld>
 </file>
 
-<file path=ppt/slides/slide12.xml><?xml version="1.0" encoding="utf-8"?>
+<file path=ppt/slides/slide14.xml><?xml version="1.0" encoding="utf-8"?>
 <p:sld xmlns:a="http://schemas.openxmlformats.org/drawingml/2006/main" xmlns:r="http://schemas.openxmlformats.org/officeDocument/2006/relationships" xmlns:p="http://schemas.openxmlformats.org/presentationml/2006/main">
   <p:cSld>
     <p:spTree>
@@ -3503,7 +3870,7 @@
 </p:sld>
 </file>
 
-<file path=ppt/slides/slide13.xml><?xml version="1.0" encoding="utf-8"?>
+<file path=ppt/slides/slide15.xml><?xml version="1.0" encoding="utf-8"?>
 <p:sld xmlns:a="http://schemas.openxmlformats.org/drawingml/2006/main" xmlns:r="http://schemas.openxmlformats.org/officeDocument/2006/relationships" xmlns:p="http://schemas.openxmlformats.org/presentationml/2006/main">
   <p:cSld>
     <p:spTree>
@@ -3602,7 +3969,7 @@
 </p:sld>
 </file>
 
-<file path=ppt/slides/slide14.xml><?xml version="1.0" encoding="utf-8"?>
+<file path=ppt/slides/slide16.xml><?xml version="1.0" encoding="utf-8"?>
 <p:sld xmlns:a="http://schemas.openxmlformats.org/drawingml/2006/main" xmlns:r="http://schemas.openxmlformats.org/officeDocument/2006/relationships" xmlns:p="http://schemas.openxmlformats.org/presentationml/2006/main">
   <p:cSld>
     <p:spTree>
@@ -3829,7 +4196,7 @@
 </p:sld>
 </file>
 
-<file path=ppt/slides/slide15.xml><?xml version="1.0" encoding="utf-8"?>
+<file path=ppt/slides/slide17.xml><?xml version="1.0" encoding="utf-8"?>
 <p:sld xmlns:a="http://schemas.openxmlformats.org/drawingml/2006/main" xmlns:r="http://schemas.openxmlformats.org/officeDocument/2006/relationships" xmlns:p="http://schemas.openxmlformats.org/presentationml/2006/main">
   <p:cSld>
     <p:spTree>
@@ -3928,329 +4295,6 @@
 </p:sld>
 </file>
 
-<file path=ppt/slides/slide16.xml><?xml version="1.0" encoding="utf-8"?>
-<p:sld xmlns:a="http://schemas.openxmlformats.org/drawingml/2006/main" xmlns:r="http://schemas.openxmlformats.org/officeDocument/2006/relationships" xmlns:p="http://schemas.openxmlformats.org/presentationml/2006/main">
-  <p:cSld>
-    <p:spTree>
-      <p:nvGrpSpPr>
-        <p:cNvPr id="1" name=""/>
-        <p:cNvGrpSpPr/>
-        <p:nvPr/>
-      </p:nvGrpSpPr>
-      <p:grpSpPr>
-        <a:xfrm>
-          <a:off x="0" y="0"/>
-          <a:ext cx="0" cy="0"/>
-          <a:chOff x="0" y="0"/>
-          <a:chExt cx="0" cy="0"/>
-        </a:xfrm>
-      </p:grpSpPr>
-      <p:sp>
-        <p:nvSpPr>
-          <p:cNvPr id="2" name="제목 1"/>
-          <p:cNvSpPr>
-            <a:spLocks noGrp="1"/>
-          </p:cNvSpPr>
-          <p:nvPr>
-            <p:ph type="title"/>
-          </p:nvPr>
-        </p:nvSpPr>
-        <p:spPr/>
-        <p:txBody>
-          <a:bodyPr/>
-          <a:lstStyle/>
-          <a:p>
-            <a:r>
-              <a:rPr lang="en-US" altLang="ko-KR" dirty="0"/>
-              <a:t>CMOS AC-transient </a:t>
-            </a:r>
-            <a:r>
-              <a:rPr lang="ko-KR" altLang="en-US" dirty="0"/>
-              <a:t>그래프</a:t>
-            </a:r>
-          </a:p>
-        </p:txBody>
-      </p:sp>
-      <p:sp>
-        <p:nvSpPr>
-          <p:cNvPr id="3" name="내용 개체 틀 2"/>
-          <p:cNvSpPr>
-            <a:spLocks noGrp="1"/>
-          </p:cNvSpPr>
-          <p:nvPr>
-            <p:ph idx="1"/>
-          </p:nvPr>
-        </p:nvSpPr>
-        <p:spPr/>
-        <p:txBody>
-          <a:bodyPr/>
-          <a:lstStyle/>
-          <a:p>
-            <a:r>
-              <a:rPr lang="en-US" altLang="ko-KR" dirty="0"/>
-              <a:t>X</a:t>
-            </a:r>
-            <a:r>
-              <a:rPr lang="ko-KR" altLang="en-US" dirty="0"/>
-              <a:t>축</a:t>
-            </a:r>
-            <a:r>
-              <a:rPr lang="en-US" altLang="ko-KR" dirty="0"/>
-              <a:t>: </a:t>
-            </a:r>
-            <a:r>
-              <a:rPr lang="ko-KR" altLang="en-US" dirty="0"/>
-              <a:t>시간</a:t>
-            </a:r>
-            <a:endParaRPr lang="en-US" altLang="ko-KR" dirty="0"/>
-          </a:p>
-          <a:p>
-            <a:r>
-              <a:rPr lang="en-US" altLang="ko-KR" dirty="0"/>
-              <a:t>Y</a:t>
-            </a:r>
-            <a:r>
-              <a:rPr lang="ko-KR" altLang="en-US" dirty="0"/>
-              <a:t>축</a:t>
-            </a:r>
-            <a:r>
-              <a:rPr lang="en-US" altLang="ko-KR" dirty="0"/>
-              <a:t>: </a:t>
-            </a:r>
-            <a:r>
-              <a:rPr lang="ko-KR" altLang="en-US" dirty="0"/>
-              <a:t>출력 전압</a:t>
-            </a:r>
-            <a:endParaRPr lang="en-US" altLang="ko-KR" dirty="0"/>
-          </a:p>
-          <a:p>
-            <a:r>
-              <a:rPr lang="ko-KR" altLang="en-US" dirty="0"/>
-              <a:t>연두색 곡선</a:t>
-            </a:r>
-            <a:r>
-              <a:rPr lang="en-US" altLang="ko-KR" dirty="0"/>
-              <a:t>: </a:t>
-            </a:r>
-            <a:r>
-              <a:rPr lang="ko-KR" altLang="en-US" dirty="0"/>
-              <a:t>입력 신호</a:t>
-            </a:r>
-            <a:endParaRPr lang="en-US" altLang="ko-KR" dirty="0"/>
-          </a:p>
-          <a:p>
-            <a:r>
-              <a:rPr lang="ko-KR" altLang="en-US" dirty="0"/>
-              <a:t>붉은색 곡선</a:t>
-            </a:r>
-            <a:r>
-              <a:rPr lang="en-US" altLang="ko-KR" dirty="0"/>
-              <a:t>: </a:t>
-            </a:r>
-            <a:r>
-              <a:rPr lang="ko-KR" altLang="en-US" dirty="0"/>
-              <a:t>출력 신호</a:t>
-            </a:r>
-            <a:endParaRPr lang="en-US" altLang="ko-KR" dirty="0"/>
-          </a:p>
-          <a:p>
-            <a:r>
-              <a:rPr lang="ko-KR" altLang="en-US" dirty="0"/>
-              <a:t>파형 반전</a:t>
-            </a:r>
-            <a:r>
-              <a:rPr lang="en-US" altLang="ko-KR" dirty="0"/>
-              <a:t>: </a:t>
-            </a:r>
-            <a:r>
-              <a:rPr lang="ko-KR" altLang="en-US" dirty="0"/>
-              <a:t>출력 신호는 입력 신호와 </a:t>
-            </a:r>
-            <a:r>
-              <a:rPr lang="en-US" altLang="ko-KR" dirty="0"/>
-              <a:t>180</a:t>
-            </a:r>
-            <a:r>
-              <a:rPr lang="ko-KR" altLang="en-US" dirty="0"/>
-              <a:t>도의 위상차를 가지며</a:t>
-            </a:r>
-            <a:r>
-              <a:rPr lang="en-US" altLang="ko-KR" dirty="0"/>
-              <a:t>, </a:t>
-            </a:r>
-            <a:r>
-              <a:rPr lang="ko-KR" altLang="en-US" dirty="0"/>
-              <a:t>이는 전형적인 반전 동작을 의미한다</a:t>
-            </a:r>
-            <a:r>
-              <a:rPr lang="en-US" altLang="ko-KR" dirty="0"/>
-              <a:t>.</a:t>
-            </a:r>
-          </a:p>
-        </p:txBody>
-      </p:sp>
-    </p:spTree>
-    <p:extLst>
-      <p:ext uri="{BB962C8B-B14F-4D97-AF65-F5344CB8AC3E}">
-        <p14:creationId xmlns:p14="http://schemas.microsoft.com/office/powerpoint/2010/main" val="3011472750"/>
-      </p:ext>
-    </p:extLst>
-  </p:cSld>
-  <p:clrMapOvr>
-    <a:masterClrMapping/>
-  </p:clrMapOvr>
-</p:sld>
-</file>
-
-<file path=ppt/slides/slide17.xml><?xml version="1.0" encoding="utf-8"?>
-<p:sld xmlns:a="http://schemas.openxmlformats.org/drawingml/2006/main" xmlns:r="http://schemas.openxmlformats.org/officeDocument/2006/relationships" xmlns:p="http://schemas.openxmlformats.org/presentationml/2006/main">
-  <p:cSld>
-    <p:spTree>
-      <p:nvGrpSpPr>
-        <p:cNvPr id="1" name=""/>
-        <p:cNvGrpSpPr/>
-        <p:nvPr/>
-      </p:nvGrpSpPr>
-      <p:grpSpPr>
-        <a:xfrm>
-          <a:off x="0" y="0"/>
-          <a:ext cx="0" cy="0"/>
-          <a:chOff x="0" y="0"/>
-          <a:chExt cx="0" cy="0"/>
-        </a:xfrm>
-      </p:grpSpPr>
-      <p:sp>
-        <p:nvSpPr>
-          <p:cNvPr id="2" name="제목 1"/>
-          <p:cNvSpPr>
-            <a:spLocks noGrp="1"/>
-          </p:cNvSpPr>
-          <p:nvPr>
-            <p:ph type="title"/>
-          </p:nvPr>
-        </p:nvSpPr>
-        <p:spPr/>
-        <p:txBody>
-          <a:bodyPr/>
-          <a:lstStyle/>
-          <a:p>
-            <a:r>
-              <a:rPr lang="en-US" altLang="ko-KR" dirty="0"/>
-              <a:t>CMOS AC-transient </a:t>
-            </a:r>
-            <a:r>
-              <a:rPr lang="ko-KR" altLang="en-US" dirty="0"/>
-              <a:t>그래프</a:t>
-            </a:r>
-          </a:p>
-        </p:txBody>
-      </p:sp>
-      <p:sp>
-        <p:nvSpPr>
-          <p:cNvPr id="3" name="내용 개체 틀 2"/>
-          <p:cNvSpPr>
-            <a:spLocks noGrp="1"/>
-          </p:cNvSpPr>
-          <p:nvPr>
-            <p:ph idx="1"/>
-          </p:nvPr>
-        </p:nvSpPr>
-        <p:spPr/>
-        <p:txBody>
-          <a:bodyPr/>
-          <a:lstStyle/>
-          <a:p>
-            <a:r>
-              <a:rPr lang="ko-KR" altLang="en-US" dirty="0"/>
-              <a:t>진폭 변화</a:t>
-            </a:r>
-            <a:r>
-              <a:rPr lang="en-US" altLang="ko-KR" dirty="0"/>
-              <a:t>: </a:t>
-            </a:r>
-            <a:r>
-              <a:rPr lang="ko-KR" altLang="en-US" dirty="0"/>
-              <a:t>출력 신호가 입력 신호보다 대략 </a:t>
-            </a:r>
-            <a:r>
-              <a:rPr lang="en-US" altLang="ko-KR" dirty="0"/>
-              <a:t>7</a:t>
-            </a:r>
-            <a:r>
-              <a:rPr lang="ko-KR" altLang="en-US" dirty="0"/>
-              <a:t>배 큰 진폭을 나타낸다</a:t>
-            </a:r>
-            <a:r>
-              <a:rPr lang="en-US" altLang="ko-KR" dirty="0"/>
-              <a:t>.</a:t>
-            </a:r>
-          </a:p>
-          <a:p>
-            <a:r>
-              <a:rPr lang="ko-KR" altLang="en-US" dirty="0"/>
-              <a:t>결론</a:t>
-            </a:r>
-            <a:r>
-              <a:rPr lang="en-US" altLang="ko-KR" dirty="0"/>
-              <a:t>: </a:t>
-            </a:r>
-            <a:r>
-              <a:rPr lang="ko-KR" altLang="en-US" dirty="0"/>
-              <a:t>이러한 정황들을 분석한 결과 </a:t>
-            </a:r>
-            <a:r>
-              <a:rPr lang="en-US" altLang="ko-KR" dirty="0"/>
-              <a:t>CMOS </a:t>
-            </a:r>
-            <a:r>
-              <a:rPr lang="ko-KR" altLang="en-US" dirty="0"/>
-              <a:t>회로는 입력 신호와 비교했을 때</a:t>
-            </a:r>
-            <a:r>
-              <a:rPr lang="en-US" altLang="ko-KR" dirty="0"/>
-              <a:t>, </a:t>
-            </a:r>
-            <a:r>
-              <a:rPr lang="ko-KR" altLang="en-US" dirty="0"/>
-              <a:t>출력 신호의</a:t>
-            </a:r>
-            <a:r>
-              <a:rPr lang="en-US" altLang="ko-KR" dirty="0"/>
-              <a:t> </a:t>
-            </a:r>
-            <a:r>
-              <a:rPr lang="ko-KR" altLang="en-US" dirty="0"/>
-              <a:t>위상을 반전시키고</a:t>
-            </a:r>
-            <a:r>
-              <a:rPr lang="en-US" altLang="ko-KR" dirty="0"/>
-              <a:t>, </a:t>
-            </a:r>
-            <a:r>
-              <a:rPr lang="ko-KR" altLang="en-US" dirty="0"/>
-              <a:t>진폭을 증폭시킨다는 사실을 관찰할 수 있다</a:t>
-            </a:r>
-            <a:r>
-              <a:rPr lang="en-US" altLang="ko-KR" dirty="0"/>
-              <a:t>.</a:t>
-            </a:r>
-            <a:endParaRPr lang="ko-KR" altLang="en-US" dirty="0"/>
-          </a:p>
-        </p:txBody>
-      </p:sp>
-    </p:spTree>
-    <p:extLst>
-      <p:ext uri="{BB962C8B-B14F-4D97-AF65-F5344CB8AC3E}">
-        <p14:creationId xmlns:p14="http://schemas.microsoft.com/office/powerpoint/2010/main" val="107321509"/>
-      </p:ext>
-    </p:extLst>
-  </p:cSld>
-  <p:clrMapOvr>
-    <a:masterClrMapping/>
-  </p:clrMapOvr>
-</p:sld>
-</file>
-
 <file path=ppt/slides/slide18.xml><?xml version="1.0" encoding="utf-8"?>
 <p:sld xmlns:a="http://schemas.openxmlformats.org/drawingml/2006/main" xmlns:r="http://schemas.openxmlformats.org/officeDocument/2006/relationships" xmlns:p="http://schemas.openxmlformats.org/presentationml/2006/main">
   <p:cSld>
@@ -4285,42 +4329,18 @@
           <a:p>
             <a:r>
               <a:rPr lang="en-US" altLang="ko-KR" dirty="0"/>
-              <a:t>NMOS</a:t>
-            </a:r>
-            <a:r>
-              <a:rPr lang="ko-KR" altLang="en-US" dirty="0"/>
-              <a:t>의 </a:t>
-            </a:r>
-            <a:r>
-              <a:rPr lang="en-US" altLang="ko-KR" dirty="0"/>
-              <a:t>I</a:t>
-            </a:r>
-            <a:r>
-              <a:rPr lang="en-US" altLang="ko-KR" baseline="-25000" dirty="0"/>
-              <a:t>D</a:t>
-            </a:r>
-            <a:r>
-              <a:rPr lang="en-US" altLang="ko-KR" dirty="0"/>
-              <a:t>/V</a:t>
-            </a:r>
-            <a:r>
-              <a:rPr lang="en-US" altLang="ko-KR" baseline="-25000" dirty="0"/>
-              <a:t>DS</a:t>
-            </a:r>
-            <a:r>
-              <a:rPr lang="en-US" altLang="ko-KR" dirty="0"/>
-              <a:t> </a:t>
-            </a:r>
-            <a:r>
-              <a:rPr lang="ko-KR" altLang="en-US" dirty="0"/>
-              <a:t>곡선</a:t>
-            </a:r>
-          </a:p>
-        </p:txBody>
-      </p:sp>
-      <p:sp>
-        <p:nvSpPr>
-          <p:cNvPr id="5" name="내용 개체 틀 4"/>
+              <a:t>CMOS AC-transient </a:t>
+            </a:r>
+            <a:r>
+              <a:rPr lang="ko-KR" altLang="en-US" dirty="0"/>
+              <a:t>그래프</a:t>
+            </a:r>
+          </a:p>
+        </p:txBody>
+      </p:sp>
+      <p:sp>
+        <p:nvSpPr>
+          <p:cNvPr id="3" name="내용 개체 틀 2"/>
           <p:cNvSpPr>
             <a:spLocks noGrp="1"/>
           </p:cNvSpPr>
@@ -4333,38 +4353,113 @@
           <a:bodyPr/>
           <a:lstStyle/>
           <a:p>
-            <a:endParaRPr lang="ko-KR" altLang="en-US"/>
-          </a:p>
-        </p:txBody>
-      </p:sp>
-      <p:pic>
-        <p:nvPicPr>
-          <p:cNvPr id="6" name="내용 개체 틀 3"/>
-          <p:cNvPicPr>
-            <a:picLocks noChangeAspect="1"/>
-          </p:cNvPicPr>
-          <p:nvPr/>
-        </p:nvPicPr>
-        <p:blipFill>
-          <a:blip r:embed="rId2"/>
-          <a:stretch>
-            <a:fillRect/>
-          </a:stretch>
-        </p:blipFill>
-        <p:spPr>
-          <a:xfrm>
-            <a:off x="838200" y="1859181"/>
-            <a:ext cx="10515600" cy="4351338"/>
-          </a:xfrm>
-          <a:prstGeom prst="rect">
-            <a:avLst/>
-          </a:prstGeom>
-        </p:spPr>
-      </p:pic>
+            <a:r>
+              <a:rPr lang="en-US" altLang="ko-KR" dirty="0"/>
+              <a:t>X</a:t>
+            </a:r>
+            <a:r>
+              <a:rPr lang="ko-KR" altLang="en-US" dirty="0"/>
+              <a:t>축</a:t>
+            </a:r>
+            <a:r>
+              <a:rPr lang="en-US" altLang="ko-KR" dirty="0"/>
+              <a:t>: </a:t>
+            </a:r>
+            <a:r>
+              <a:rPr lang="ko-KR" altLang="en-US" dirty="0"/>
+              <a:t>시간</a:t>
+            </a:r>
+            <a:endParaRPr lang="en-US" altLang="ko-KR" dirty="0"/>
+          </a:p>
+          <a:p>
+            <a:r>
+              <a:rPr lang="en-US" altLang="ko-KR" dirty="0"/>
+              <a:t>Y</a:t>
+            </a:r>
+            <a:r>
+              <a:rPr lang="ko-KR" altLang="en-US" dirty="0"/>
+              <a:t>축</a:t>
+            </a:r>
+            <a:r>
+              <a:rPr lang="en-US" altLang="ko-KR" dirty="0"/>
+              <a:t>: </a:t>
+            </a:r>
+            <a:r>
+              <a:rPr lang="ko-KR" altLang="en-US" dirty="0"/>
+              <a:t>출력 전압</a:t>
+            </a:r>
+            <a:endParaRPr lang="en-US" altLang="ko-KR" dirty="0"/>
+          </a:p>
+          <a:p>
+            <a:r>
+              <a:rPr lang="ko-KR" altLang="en-US" dirty="0"/>
+              <a:t>연두색 곡선</a:t>
+            </a:r>
+            <a:r>
+              <a:rPr lang="en-US" altLang="ko-KR" dirty="0"/>
+              <a:t>: </a:t>
+            </a:r>
+            <a:r>
+              <a:rPr lang="ko-KR" altLang="en-US" dirty="0"/>
+              <a:t>입력 신호</a:t>
+            </a:r>
+            <a:endParaRPr lang="en-US" altLang="ko-KR" dirty="0"/>
+          </a:p>
+          <a:p>
+            <a:r>
+              <a:rPr lang="ko-KR" altLang="en-US" dirty="0"/>
+              <a:t>붉은색 곡선</a:t>
+            </a:r>
+            <a:r>
+              <a:rPr lang="en-US" altLang="ko-KR" dirty="0"/>
+              <a:t>: </a:t>
+            </a:r>
+            <a:r>
+              <a:rPr lang="ko-KR" altLang="en-US" dirty="0"/>
+              <a:t>출력 신호</a:t>
+            </a:r>
+            <a:endParaRPr lang="en-US" altLang="ko-KR" dirty="0"/>
+          </a:p>
+          <a:p>
+            <a:r>
+              <a:rPr lang="ko-KR" altLang="en-US" dirty="0"/>
+              <a:t>파형 반전</a:t>
+            </a:r>
+            <a:r>
+              <a:rPr lang="en-US" altLang="ko-KR" dirty="0"/>
+              <a:t>: </a:t>
+            </a:r>
+            <a:r>
+              <a:rPr lang="ko-KR" altLang="en-US" dirty="0"/>
+              <a:t>출력 신호는 입력 신호와 </a:t>
+            </a:r>
+            <a:r>
+              <a:rPr lang="en-US" altLang="ko-KR" dirty="0"/>
+              <a:t>180</a:t>
+            </a:r>
+            <a:r>
+              <a:rPr lang="ko-KR" altLang="en-US" dirty="0"/>
+              <a:t>도의 위상차를 가지며</a:t>
+            </a:r>
+            <a:r>
+              <a:rPr lang="en-US" altLang="ko-KR" dirty="0"/>
+              <a:t>, </a:t>
+            </a:r>
+            <a:r>
+              <a:rPr lang="ko-KR" altLang="en-US" dirty="0"/>
+              <a:t>이는 전형적인 반전 동작을 의미한다</a:t>
+            </a:r>
+            <a:r>
+              <a:rPr lang="en-US" altLang="ko-KR" dirty="0"/>
+              <a:t>.</a:t>
+            </a:r>
+          </a:p>
+        </p:txBody>
+      </p:sp>
     </p:spTree>
     <p:extLst>
       <p:ext uri="{BB962C8B-B14F-4D97-AF65-F5344CB8AC3E}">
-        <p14:creationId xmlns:p14="http://schemas.microsoft.com/office/powerpoint/2010/main" val="249926574"/>
+        <p14:creationId xmlns:p14="http://schemas.microsoft.com/office/powerpoint/2010/main" val="3011472750"/>
       </p:ext>
     </p:extLst>
   </p:cSld>
@@ -4408,27 +4503,83 @@
           <a:p>
             <a:r>
               <a:rPr lang="en-US" altLang="ko-KR" dirty="0"/>
-              <a:t>NMOS</a:t>
-            </a:r>
-            <a:r>
-              <a:rPr lang="ko-KR" altLang="en-US" dirty="0"/>
-              <a:t>의 </a:t>
-            </a:r>
-            <a:r>
-              <a:rPr lang="en-US" altLang="ko-KR" dirty="0"/>
-              <a:t>I</a:t>
-            </a:r>
-            <a:r>
-              <a:rPr lang="en-US" altLang="ko-KR" baseline="-25000" dirty="0"/>
-              <a:t>D</a:t>
-            </a:r>
-            <a:r>
-              <a:rPr lang="en-US" altLang="ko-KR" dirty="0"/>
-              <a:t>/V</a:t>
-            </a:r>
-            <a:r>
-              <a:rPr lang="en-US" altLang="ko-KR" baseline="-25000" dirty="0"/>
-              <a:t>DS</a:t>
+              <a:t>CMOS AC-transient </a:t>
+            </a:r>
+            <a:r>
+              <a:rPr lang="ko-KR" altLang="en-US" dirty="0"/>
+              <a:t>그래프</a:t>
+            </a:r>
+          </a:p>
+        </p:txBody>
+      </p:sp>
+      <p:sp>
+        <p:nvSpPr>
+          <p:cNvPr id="3" name="내용 개체 틀 2"/>
+          <p:cNvSpPr>
+            <a:spLocks noGrp="1"/>
+          </p:cNvSpPr>
+          <p:nvPr>
+            <p:ph idx="1"/>
+          </p:nvPr>
+        </p:nvSpPr>
+        <p:spPr/>
+        <p:txBody>
+          <a:bodyPr/>
+          <a:lstStyle/>
+          <a:p>
+            <a:r>
+              <a:rPr lang="ko-KR" altLang="en-US" dirty="0"/>
+              <a:t>진폭 변화</a:t>
+            </a:r>
+            <a:r>
+              <a:rPr lang="en-US" altLang="ko-KR" dirty="0"/>
+              <a:t>: </a:t>
+            </a:r>
+            <a:r>
+              <a:rPr lang="ko-KR" altLang="en-US" dirty="0"/>
+              <a:t>출력 신호가 입력 신호보다 대략 </a:t>
+            </a:r>
+            <a:r>
+              <a:rPr lang="en-US" altLang="ko-KR" dirty="0"/>
+              <a:t>7</a:t>
+            </a:r>
+            <a:r>
+              <a:rPr lang="ko-KR" altLang="en-US" dirty="0"/>
+              <a:t>배 큰 진폭을 나타낸다</a:t>
+            </a:r>
+            <a:r>
+              <a:rPr lang="en-US" altLang="ko-KR" dirty="0"/>
+              <a:t>.</a:t>
+            </a:r>
+          </a:p>
+          <a:p>
+            <a:r>
+              <a:rPr lang="ko-KR" altLang="en-US" dirty="0"/>
+              <a:t>결론</a:t>
+            </a:r>
+            <a:r>
+              <a:rPr lang="en-US" altLang="ko-KR" dirty="0"/>
+              <a:t>: </a:t>
+            </a:r>
+            <a:r>
+              <a:rPr lang="ko-KR" altLang="en-US" dirty="0"/>
+              <a:t>이러한 정황들을 분석한 결과 </a:t>
+            </a:r>
+            <a:r>
+              <a:rPr lang="en-US" altLang="ko-KR" dirty="0"/>
+              <a:t>CMOS </a:t>
+            </a:r>
+            <a:r>
+              <a:rPr lang="ko-KR" altLang="en-US" dirty="0"/>
+              <a:t>회로는 입력 신호와 비교했을 때</a:t>
+            </a:r>
+            <a:r>
+              <a:rPr lang="en-US" altLang="ko-KR" dirty="0"/>
+              <a:t>, </a:t>
+            </a:r>
+            <a:r>
+              <a:rPr lang="ko-KR" altLang="en-US" dirty="0"/>
+              <a:t>출력 신호의</a:t>
             </a:r>
             <a:r>
               <a:rPr lang="en-US" altLang="ko-KR" dirty="0"/>
@@ -4436,157 +4587,20 @@
             </a:r>
             <a:r>
               <a:rPr lang="ko-KR" altLang="en-US" dirty="0"/>
-              <a:t>곡선</a:t>
-            </a:r>
-          </a:p>
-        </p:txBody>
-      </p:sp>
-      <p:sp>
-        <p:nvSpPr>
-          <p:cNvPr id="3" name="내용 개체 틀 2"/>
-          <p:cNvSpPr>
-            <a:spLocks noGrp="1"/>
-          </p:cNvSpPr>
-          <p:nvPr>
-            <p:ph idx="1"/>
-          </p:nvPr>
-        </p:nvSpPr>
-        <p:spPr/>
-        <p:txBody>
-          <a:bodyPr/>
-          <a:lstStyle/>
-          <a:p>
-            <a:r>
-              <a:rPr lang="en-US" altLang="ko-KR" dirty="0"/>
-              <a:t>X</a:t>
-            </a:r>
-            <a:r>
-              <a:rPr lang="ko-KR" altLang="en-US" dirty="0"/>
-              <a:t>축</a:t>
-            </a:r>
-            <a:r>
-              <a:rPr lang="en-US" altLang="ko-KR" dirty="0"/>
-              <a:t>: </a:t>
-            </a:r>
-            <a:r>
-              <a:rPr lang="ko-KR" altLang="en-US" dirty="0" err="1"/>
-              <a:t>드레인</a:t>
-            </a:r>
-            <a:r>
-              <a:rPr lang="en-US" altLang="ko-KR" dirty="0"/>
-              <a:t>-</a:t>
-            </a:r>
-            <a:r>
-              <a:rPr lang="ko-KR" altLang="en-US" dirty="0"/>
-              <a:t>소스 전압</a:t>
-            </a:r>
-            <a:endParaRPr lang="en-US" altLang="ko-KR" dirty="0"/>
-          </a:p>
-          <a:p>
-            <a:r>
-              <a:rPr lang="en-US" altLang="ko-KR" dirty="0"/>
-              <a:t>Y</a:t>
-            </a:r>
-            <a:r>
-              <a:rPr lang="ko-KR" altLang="en-US" dirty="0"/>
-              <a:t>축</a:t>
-            </a:r>
-            <a:r>
-              <a:rPr lang="en-US" altLang="ko-KR" dirty="0"/>
-              <a:t>: </a:t>
-            </a:r>
-            <a:r>
-              <a:rPr lang="ko-KR" altLang="en-US" dirty="0" err="1"/>
-              <a:t>드레인</a:t>
-            </a:r>
-            <a:r>
-              <a:rPr lang="ko-KR" altLang="en-US" dirty="0"/>
-              <a:t> 전류</a:t>
-            </a:r>
-            <a:endParaRPr lang="en-US" altLang="ko-KR" dirty="0"/>
-          </a:p>
-          <a:p>
-            <a:r>
-              <a:rPr lang="ko-KR" altLang="en-US" dirty="0"/>
-              <a:t>색깔별 곡선</a:t>
-            </a:r>
-            <a:r>
-              <a:rPr lang="en-US" altLang="ko-KR" dirty="0"/>
-              <a:t>: : V</a:t>
-            </a:r>
-            <a:r>
-              <a:rPr lang="en-US" altLang="ko-KR" baseline="-25000" dirty="0"/>
-              <a:t>GS</a:t>
-            </a:r>
-            <a:r>
-              <a:rPr lang="en-US" altLang="ko-KR" dirty="0"/>
-              <a:t>(</a:t>
-            </a:r>
-            <a:r>
-              <a:rPr lang="ko-KR" altLang="en-US" dirty="0"/>
-              <a:t>게이트</a:t>
-            </a:r>
-            <a:r>
-              <a:rPr lang="en-US" altLang="ko-KR" dirty="0"/>
-              <a:t>-</a:t>
-            </a:r>
-            <a:r>
-              <a:rPr lang="ko-KR" altLang="en-US" dirty="0"/>
-              <a:t>소스 전압</a:t>
-            </a:r>
-            <a:r>
-              <a:rPr lang="en-US" altLang="ko-KR" dirty="0"/>
-              <a:t>) </a:t>
-            </a:r>
-            <a:r>
-              <a:rPr lang="ko-KR" altLang="en-US" dirty="0"/>
-              <a:t>값이 </a:t>
-            </a:r>
-            <a:r>
-              <a:rPr lang="en-US" altLang="ko-KR" dirty="0"/>
-              <a:t>0~1.2V</a:t>
-            </a:r>
-            <a:r>
-              <a:rPr lang="ko-KR" altLang="en-US" dirty="0"/>
-              <a:t>의 값에서 어떻게 전류가 변하는지 보여준다</a:t>
+              <a:t>위상을 반전시키고</a:t>
+            </a:r>
+            <a:r>
+              <a:rPr lang="en-US" altLang="ko-KR" dirty="0"/>
+              <a:t>, </a:t>
+            </a:r>
+            <a:r>
+              <a:rPr lang="ko-KR" altLang="en-US" dirty="0"/>
+              <a:t>진폭을 증폭시킨다는 사실을 관찰할 수 있다</a:t>
             </a:r>
             <a:r>
               <a:rPr lang="en-US" altLang="ko-KR" dirty="0"/>
               <a:t>.</a:t>
             </a:r>
-          </a:p>
-          <a:p>
-            <a:r>
-              <a:rPr lang="ko-KR" altLang="en-US" dirty="0"/>
-              <a:t>결론</a:t>
-            </a:r>
-            <a:r>
-              <a:rPr lang="en-US" altLang="ko-KR" dirty="0"/>
-              <a:t>: NMOS </a:t>
-            </a:r>
-            <a:r>
-              <a:rPr lang="ko-KR" altLang="en-US" dirty="0"/>
-              <a:t>특성상 전류는 양수 방향으로 흐르며</a:t>
-            </a:r>
-            <a:r>
-              <a:rPr lang="en-US" altLang="ko-KR" dirty="0"/>
-              <a:t>, V</a:t>
-            </a:r>
-            <a:r>
-              <a:rPr lang="en-US" altLang="ko-KR" baseline="-25000" dirty="0"/>
-              <a:t>GS</a:t>
-            </a:r>
-            <a:r>
-              <a:rPr lang="ko-KR" altLang="en-US" dirty="0"/>
-              <a:t>값이 클수록 흐르는 전류가 커진다</a:t>
-            </a:r>
-            <a:r>
-              <a:rPr lang="en-US" altLang="ko-KR" dirty="0"/>
-              <a:t>.</a:t>
-            </a:r>
-            <a:endParaRPr lang="ko-KR" altLang="en-US" dirty="0"/>
-          </a:p>
-          <a:p>
             <a:endParaRPr lang="ko-KR" altLang="en-US" dirty="0"/>
           </a:p>
         </p:txBody>
@@ -4594,7 +4608,7 @@
     </p:spTree>
     <p:extLst>
       <p:ext uri="{BB962C8B-B14F-4D97-AF65-F5344CB8AC3E}">
-        <p14:creationId xmlns:p14="http://schemas.microsoft.com/office/powerpoint/2010/main" val="381721583"/>
+        <p14:creationId xmlns:p14="http://schemas.microsoft.com/office/powerpoint/2010/main" val="107321509"/>
       </p:ext>
     </p:extLst>
   </p:cSld>
@@ -4785,6 +4799,359 @@
           <a:bodyPr/>
           <a:lstStyle/>
           <a:p>
+            <a:endParaRPr lang="ko-KR" altLang="en-US"/>
+          </a:p>
+        </p:txBody>
+      </p:sp>
+      <p:pic>
+        <p:nvPicPr>
+          <p:cNvPr id="6" name="내용 개체 틀 3"/>
+          <p:cNvPicPr>
+            <a:picLocks noChangeAspect="1"/>
+          </p:cNvPicPr>
+          <p:nvPr/>
+        </p:nvPicPr>
+        <p:blipFill>
+          <a:blip r:embed="rId2"/>
+          <a:stretch>
+            <a:fillRect/>
+          </a:stretch>
+        </p:blipFill>
+        <p:spPr>
+          <a:xfrm>
+            <a:off x="838200" y="1859181"/>
+            <a:ext cx="10515600" cy="4351338"/>
+          </a:xfrm>
+          <a:prstGeom prst="rect">
+            <a:avLst/>
+          </a:prstGeom>
+        </p:spPr>
+      </p:pic>
+    </p:spTree>
+    <p:extLst>
+      <p:ext uri="{BB962C8B-B14F-4D97-AF65-F5344CB8AC3E}">
+        <p14:creationId xmlns:p14="http://schemas.microsoft.com/office/powerpoint/2010/main" val="249926574"/>
+      </p:ext>
+    </p:extLst>
+  </p:cSld>
+  <p:clrMapOvr>
+    <a:masterClrMapping/>
+  </p:clrMapOvr>
+</p:sld>
+</file>
+
+<file path=ppt/slides/slide21.xml><?xml version="1.0" encoding="utf-8"?>
+<p:sld xmlns:a="http://schemas.openxmlformats.org/drawingml/2006/main" xmlns:r="http://schemas.openxmlformats.org/officeDocument/2006/relationships" xmlns:p="http://schemas.openxmlformats.org/presentationml/2006/main">
+  <p:cSld>
+    <p:spTree>
+      <p:nvGrpSpPr>
+        <p:cNvPr id="1" name=""/>
+        <p:cNvGrpSpPr/>
+        <p:nvPr/>
+      </p:nvGrpSpPr>
+      <p:grpSpPr>
+        <a:xfrm>
+          <a:off x="0" y="0"/>
+          <a:ext cx="0" cy="0"/>
+          <a:chOff x="0" y="0"/>
+          <a:chExt cx="0" cy="0"/>
+        </a:xfrm>
+      </p:grpSpPr>
+      <p:sp>
+        <p:nvSpPr>
+          <p:cNvPr id="2" name="제목 1"/>
+          <p:cNvSpPr>
+            <a:spLocks noGrp="1"/>
+          </p:cNvSpPr>
+          <p:nvPr>
+            <p:ph type="title"/>
+          </p:nvPr>
+        </p:nvSpPr>
+        <p:spPr/>
+        <p:txBody>
+          <a:bodyPr/>
+          <a:lstStyle/>
+          <a:p>
+            <a:r>
+              <a:rPr lang="en-US" altLang="ko-KR" dirty="0"/>
+              <a:t>NMOS</a:t>
+            </a:r>
+            <a:r>
+              <a:rPr lang="ko-KR" altLang="en-US" dirty="0"/>
+              <a:t>의 </a:t>
+            </a:r>
+            <a:r>
+              <a:rPr lang="en-US" altLang="ko-KR" dirty="0"/>
+              <a:t>I</a:t>
+            </a:r>
+            <a:r>
+              <a:rPr lang="en-US" altLang="ko-KR" baseline="-25000" dirty="0"/>
+              <a:t>D</a:t>
+            </a:r>
+            <a:r>
+              <a:rPr lang="en-US" altLang="ko-KR" dirty="0"/>
+              <a:t>/V</a:t>
+            </a:r>
+            <a:r>
+              <a:rPr lang="en-US" altLang="ko-KR" baseline="-25000" dirty="0"/>
+              <a:t>DS</a:t>
+            </a:r>
+            <a:r>
+              <a:rPr lang="en-US" altLang="ko-KR" dirty="0"/>
+              <a:t> </a:t>
+            </a:r>
+            <a:r>
+              <a:rPr lang="ko-KR" altLang="en-US" dirty="0"/>
+              <a:t>곡선</a:t>
+            </a:r>
+          </a:p>
+        </p:txBody>
+      </p:sp>
+      <p:sp>
+        <p:nvSpPr>
+          <p:cNvPr id="3" name="내용 개체 틀 2"/>
+          <p:cNvSpPr>
+            <a:spLocks noGrp="1"/>
+          </p:cNvSpPr>
+          <p:nvPr>
+            <p:ph idx="1"/>
+          </p:nvPr>
+        </p:nvSpPr>
+        <p:spPr/>
+        <p:txBody>
+          <a:bodyPr/>
+          <a:lstStyle/>
+          <a:p>
+            <a:r>
+              <a:rPr lang="en-US" altLang="ko-KR" dirty="0"/>
+              <a:t>X</a:t>
+            </a:r>
+            <a:r>
+              <a:rPr lang="ko-KR" altLang="en-US" dirty="0"/>
+              <a:t>축</a:t>
+            </a:r>
+            <a:r>
+              <a:rPr lang="en-US" altLang="ko-KR" dirty="0"/>
+              <a:t>: </a:t>
+            </a:r>
+            <a:r>
+              <a:rPr lang="ko-KR" altLang="en-US" dirty="0" err="1"/>
+              <a:t>드레인</a:t>
+            </a:r>
+            <a:r>
+              <a:rPr lang="en-US" altLang="ko-KR" dirty="0"/>
+              <a:t>-</a:t>
+            </a:r>
+            <a:r>
+              <a:rPr lang="ko-KR" altLang="en-US" dirty="0"/>
+              <a:t>소스 전압</a:t>
+            </a:r>
+            <a:endParaRPr lang="en-US" altLang="ko-KR" dirty="0"/>
+          </a:p>
+          <a:p>
+            <a:r>
+              <a:rPr lang="en-US" altLang="ko-KR" dirty="0"/>
+              <a:t>Y</a:t>
+            </a:r>
+            <a:r>
+              <a:rPr lang="ko-KR" altLang="en-US" dirty="0"/>
+              <a:t>축</a:t>
+            </a:r>
+            <a:r>
+              <a:rPr lang="en-US" altLang="ko-KR" dirty="0"/>
+              <a:t>: </a:t>
+            </a:r>
+            <a:r>
+              <a:rPr lang="ko-KR" altLang="en-US" dirty="0" err="1"/>
+              <a:t>드레인</a:t>
+            </a:r>
+            <a:r>
+              <a:rPr lang="ko-KR" altLang="en-US" dirty="0"/>
+              <a:t> 전류</a:t>
+            </a:r>
+            <a:endParaRPr lang="en-US" altLang="ko-KR" dirty="0"/>
+          </a:p>
+          <a:p>
+            <a:r>
+              <a:rPr lang="ko-KR" altLang="en-US" dirty="0"/>
+              <a:t>색깔별 곡선</a:t>
+            </a:r>
+            <a:r>
+              <a:rPr lang="en-US" altLang="ko-KR" dirty="0"/>
+              <a:t>: : V</a:t>
+            </a:r>
+            <a:r>
+              <a:rPr lang="en-US" altLang="ko-KR" baseline="-25000" dirty="0"/>
+              <a:t>GS</a:t>
+            </a:r>
+            <a:r>
+              <a:rPr lang="en-US" altLang="ko-KR" dirty="0"/>
+              <a:t>(</a:t>
+            </a:r>
+            <a:r>
+              <a:rPr lang="ko-KR" altLang="en-US" dirty="0"/>
+              <a:t>게이트</a:t>
+            </a:r>
+            <a:r>
+              <a:rPr lang="en-US" altLang="ko-KR" dirty="0"/>
+              <a:t>-</a:t>
+            </a:r>
+            <a:r>
+              <a:rPr lang="ko-KR" altLang="en-US" dirty="0"/>
+              <a:t>소스 전압</a:t>
+            </a:r>
+            <a:r>
+              <a:rPr lang="en-US" altLang="ko-KR" dirty="0"/>
+              <a:t>) </a:t>
+            </a:r>
+            <a:r>
+              <a:rPr lang="ko-KR" altLang="en-US" dirty="0"/>
+              <a:t>값이 </a:t>
+            </a:r>
+            <a:r>
+              <a:rPr lang="en-US" altLang="ko-KR" dirty="0"/>
+              <a:t>0~1.2V</a:t>
+            </a:r>
+            <a:r>
+              <a:rPr lang="ko-KR" altLang="en-US" dirty="0"/>
+              <a:t>의 값에서 어떻게 전류가 변하는지 보여준다</a:t>
+            </a:r>
+            <a:r>
+              <a:rPr lang="en-US" altLang="ko-KR" dirty="0"/>
+              <a:t>.</a:t>
+            </a:r>
+          </a:p>
+          <a:p>
+            <a:r>
+              <a:rPr lang="ko-KR" altLang="en-US" dirty="0"/>
+              <a:t>결론</a:t>
+            </a:r>
+            <a:r>
+              <a:rPr lang="en-US" altLang="ko-KR" dirty="0"/>
+              <a:t>: NMOS </a:t>
+            </a:r>
+            <a:r>
+              <a:rPr lang="ko-KR" altLang="en-US" dirty="0"/>
+              <a:t>특성상 전류는 양수 방향으로 흐르며</a:t>
+            </a:r>
+            <a:r>
+              <a:rPr lang="en-US" altLang="ko-KR" dirty="0"/>
+              <a:t>, V</a:t>
+            </a:r>
+            <a:r>
+              <a:rPr lang="en-US" altLang="ko-KR" baseline="-25000" dirty="0"/>
+              <a:t>GS</a:t>
+            </a:r>
+            <a:r>
+              <a:rPr lang="ko-KR" altLang="en-US" dirty="0"/>
+              <a:t>값이 클수록 흐르는 전류가 커진다</a:t>
+            </a:r>
+            <a:r>
+              <a:rPr lang="en-US" altLang="ko-KR" dirty="0"/>
+              <a:t>.</a:t>
+            </a:r>
+            <a:endParaRPr lang="ko-KR" altLang="en-US" dirty="0"/>
+          </a:p>
+          <a:p>
+            <a:endParaRPr lang="ko-KR" altLang="en-US" dirty="0"/>
+          </a:p>
+        </p:txBody>
+      </p:sp>
+    </p:spTree>
+    <p:extLst>
+      <p:ext uri="{BB962C8B-B14F-4D97-AF65-F5344CB8AC3E}">
+        <p14:creationId xmlns:p14="http://schemas.microsoft.com/office/powerpoint/2010/main" val="381721583"/>
+      </p:ext>
+    </p:extLst>
+  </p:cSld>
+  <p:clrMapOvr>
+    <a:masterClrMapping/>
+  </p:clrMapOvr>
+</p:sld>
+</file>
+
+<file path=ppt/slides/slide22.xml><?xml version="1.0" encoding="utf-8"?>
+<p:sld xmlns:a="http://schemas.openxmlformats.org/drawingml/2006/main" xmlns:r="http://schemas.openxmlformats.org/officeDocument/2006/relationships" xmlns:p="http://schemas.openxmlformats.org/presentationml/2006/main">
+  <p:cSld>
+    <p:spTree>
+      <p:nvGrpSpPr>
+        <p:cNvPr id="1" name=""/>
+        <p:cNvGrpSpPr/>
+        <p:nvPr/>
+      </p:nvGrpSpPr>
+      <p:grpSpPr>
+        <a:xfrm>
+          <a:off x="0" y="0"/>
+          <a:ext cx="0" cy="0"/>
+          <a:chOff x="0" y="0"/>
+          <a:chExt cx="0" cy="0"/>
+        </a:xfrm>
+      </p:grpSpPr>
+      <p:sp>
+        <p:nvSpPr>
+          <p:cNvPr id="2" name="제목 1"/>
+          <p:cNvSpPr>
+            <a:spLocks noGrp="1"/>
+          </p:cNvSpPr>
+          <p:nvPr>
+            <p:ph type="title"/>
+          </p:nvPr>
+        </p:nvSpPr>
+        <p:spPr/>
+        <p:txBody>
+          <a:bodyPr/>
+          <a:lstStyle/>
+          <a:p>
+            <a:r>
+              <a:rPr lang="en-US" altLang="ko-KR" dirty="0"/>
+              <a:t>NMOS</a:t>
+            </a:r>
+            <a:r>
+              <a:rPr lang="ko-KR" altLang="en-US" dirty="0"/>
+              <a:t>의 </a:t>
+            </a:r>
+            <a:r>
+              <a:rPr lang="en-US" altLang="ko-KR" dirty="0"/>
+              <a:t>I</a:t>
+            </a:r>
+            <a:r>
+              <a:rPr lang="en-US" altLang="ko-KR" baseline="-25000" dirty="0"/>
+              <a:t>D</a:t>
+            </a:r>
+            <a:r>
+              <a:rPr lang="en-US" altLang="ko-KR" dirty="0"/>
+              <a:t>/V</a:t>
+            </a:r>
+            <a:r>
+              <a:rPr lang="en-US" altLang="ko-KR" baseline="-25000" dirty="0"/>
+              <a:t>DS</a:t>
+            </a:r>
+            <a:r>
+              <a:rPr lang="en-US" altLang="ko-KR" dirty="0"/>
+              <a:t> </a:t>
+            </a:r>
+            <a:r>
+              <a:rPr lang="ko-KR" altLang="en-US" dirty="0"/>
+              <a:t>곡선</a:t>
+            </a:r>
+          </a:p>
+        </p:txBody>
+      </p:sp>
+      <p:sp>
+        <p:nvSpPr>
+          <p:cNvPr id="5" name="내용 개체 틀 4"/>
+          <p:cNvSpPr>
+            <a:spLocks noGrp="1"/>
+          </p:cNvSpPr>
+          <p:nvPr>
+            <p:ph idx="1"/>
+          </p:nvPr>
+        </p:nvSpPr>
+        <p:spPr/>
+        <p:txBody>
+          <a:bodyPr/>
+          <a:lstStyle/>
+          <a:p>
             <a:r>
               <a:rPr lang="ko-KR" altLang="en-US" dirty="0"/>
               <a:t>채널 변조 효과</a:t>
@@ -5032,7 +5399,7 @@
 </p:sld>
 </file>
 
-<file path=ppt/slides/slide21.xml><?xml version="1.0" encoding="utf-8"?>
+<file path=ppt/slides/slide23.xml><?xml version="1.0" encoding="utf-8"?>
 <p:sld xmlns:a="http://schemas.openxmlformats.org/drawingml/2006/main" xmlns:r="http://schemas.openxmlformats.org/officeDocument/2006/relationships" xmlns:p="http://schemas.openxmlformats.org/presentationml/2006/main">
   <p:cSld>
     <p:spTree>
@@ -5138,7 +5505,7 @@
 </p:sld>
 </file>
 
-<file path=ppt/slides/slide22.xml><?xml version="1.0" encoding="utf-8"?>
+<file path=ppt/slides/slide24.xml><?xml version="1.0" encoding="utf-8"?>
 <p:sld xmlns:a="http://schemas.openxmlformats.org/drawingml/2006/main" xmlns:r="http://schemas.openxmlformats.org/officeDocument/2006/relationships" xmlns:p="http://schemas.openxmlformats.org/presentationml/2006/main">
   <p:cSld>
     <p:spTree>
@@ -5375,7 +5742,7 @@
 </p:sld>
 </file>
 
-<file path=ppt/slides/slide23.xml><?xml version="1.0" encoding="utf-8"?>
+<file path=ppt/slides/slide25.xml><?xml version="1.0" encoding="utf-8"?>
 <p:sld xmlns:a="http://schemas.openxmlformats.org/drawingml/2006/main" xmlns:r="http://schemas.openxmlformats.org/officeDocument/2006/relationships" xmlns:p="http://schemas.openxmlformats.org/presentationml/2006/main">
   <p:cSld>
     <p:spTree>
@@ -5634,7 +6001,7 @@
 </p:sld>
 </file>
 
-<file path=ppt/slides/slide24.xml><?xml version="1.0" encoding="utf-8"?>
+<file path=ppt/slides/slide26.xml><?xml version="1.0" encoding="utf-8"?>
 <p:sld xmlns:a="http://schemas.openxmlformats.org/drawingml/2006/main" xmlns:r="http://schemas.openxmlformats.org/officeDocument/2006/relationships" xmlns:p="http://schemas.openxmlformats.org/presentationml/2006/main">
   <p:cSld>
     <p:spTree>
@@ -5729,7 +6096,7 @@
 </p:sld>
 </file>
 
-<file path=ppt/slides/slide25.xml><?xml version="1.0" encoding="utf-8"?>
+<file path=ppt/slides/slide27.xml><?xml version="1.0" encoding="utf-8"?>
 <p:sld xmlns:a="http://schemas.openxmlformats.org/drawingml/2006/main" xmlns:r="http://schemas.openxmlformats.org/officeDocument/2006/relationships" xmlns:p="http://schemas.openxmlformats.org/presentationml/2006/main">
   <p:cSld>
     <p:spTree>
@@ -5889,7 +6256,7 @@
 </p:sld>
 </file>
 
-<file path=ppt/slides/slide26.xml><?xml version="1.0" encoding="utf-8"?>
+<file path=ppt/slides/slide28.xml><?xml version="1.0" encoding="utf-8"?>
 <p:sld xmlns:a="http://schemas.openxmlformats.org/drawingml/2006/main" xmlns:r="http://schemas.openxmlformats.org/officeDocument/2006/relationships" xmlns:p="http://schemas.openxmlformats.org/presentationml/2006/main">
   <p:cSld>
     <p:spTree>
@@ -5968,7 +6335,7 @@
 </p:sld>
 </file>
 
-<file path=ppt/slides/slide27.xml><?xml version="1.0" encoding="utf-8"?>
+<file path=ppt/slides/slide29.xml><?xml version="1.0" encoding="utf-8"?>
 <p:sld xmlns:a="http://schemas.openxmlformats.org/drawingml/2006/main" xmlns:r="http://schemas.openxmlformats.org/officeDocument/2006/relationships" xmlns:p="http://schemas.openxmlformats.org/presentationml/2006/main">
   <p:cSld>
     <p:spTree>
@@ -6209,6 +6576,96 @@
 </file>
 
 <file path=ppt/slides/slide3.xml><?xml version="1.0" encoding="utf-8"?>
+<p:sld xmlns:a="http://schemas.openxmlformats.org/drawingml/2006/main" xmlns:r="http://schemas.openxmlformats.org/officeDocument/2006/relationships" xmlns:p="http://schemas.openxmlformats.org/presentationml/2006/main">
+  <p:cSld>
+    <p:spTree>
+      <p:nvGrpSpPr>
+        <p:cNvPr id="1" name=""/>
+        <p:cNvGrpSpPr/>
+        <p:nvPr/>
+      </p:nvGrpSpPr>
+      <p:grpSpPr>
+        <a:xfrm>
+          <a:off x="0" y="0"/>
+          <a:ext cx="0" cy="0"/>
+          <a:chOff x="0" y="0"/>
+          <a:chExt cx="0" cy="0"/>
+        </a:xfrm>
+      </p:grpSpPr>
+      <p:sp>
+        <p:nvSpPr>
+          <p:cNvPr id="2" name="제목 1"/>
+          <p:cNvSpPr>
+            <a:spLocks noGrp="1"/>
+          </p:cNvSpPr>
+          <p:nvPr>
+            <p:ph type="title"/>
+          </p:nvPr>
+        </p:nvSpPr>
+        <p:spPr/>
+        <p:txBody>
+          <a:bodyPr/>
+          <a:lstStyle/>
+          <a:p>
+            <a:r>
+              <a:rPr lang="en-US" altLang="ko-KR" dirty="0"/>
+              <a:t>CMOS NAND </a:t>
+            </a:r>
+            <a:r>
+              <a:rPr lang="en-US" altLang="ko-KR" dirty="0" smtClean="0"/>
+              <a:t>gate-Layout</a:t>
+            </a:r>
+            <a:endParaRPr lang="ko-KR" altLang="en-US" dirty="0"/>
+          </a:p>
+        </p:txBody>
+      </p:sp>
+      <p:pic>
+        <p:nvPicPr>
+          <p:cNvPr id="4" name="내용 개체 틀 3"/>
+          <p:cNvPicPr>
+            <a:picLocks noGrp="1" noChangeAspect="1"/>
+          </p:cNvPicPr>
+          <p:nvPr>
+            <p:ph idx="1"/>
+          </p:nvPr>
+        </p:nvPicPr>
+        <p:blipFill>
+          <a:blip r:embed="rId2"/>
+          <a:stretch>
+            <a:fillRect/>
+          </a:stretch>
+        </p:blipFill>
+        <p:spPr>
+          <a:xfrm>
+            <a:off x="838200" y="1796129"/>
+            <a:ext cx="10515600" cy="4351338"/>
+          </a:xfrm>
+          <a:prstGeom prst="rect">
+            <a:avLst/>
+          </a:prstGeom>
+        </p:spPr>
+      </p:pic>
+    </p:spTree>
+    <p:extLst>
+      <p:ext uri="{BB962C8B-B14F-4D97-AF65-F5344CB8AC3E}">
+        <p14:creationId xmlns:p14="http://schemas.microsoft.com/office/powerpoint/2010/main" val="3220775635"/>
+      </p:ext>
+    </p:extLst>
+  </p:cSld>
+  <p:clrMapOvr>
+    <a:masterClrMapping/>
+  </p:clrMapOvr>
+  <p:timing>
+    <p:tnLst>
+      <p:par>
+        <p:cTn id="1" dur="indefinite" restart="never" nodeType="tmRoot"/>
+      </p:par>
+    </p:tnLst>
+  </p:timing>
+</p:sld>
+</file>
+
+<file path=ppt/slides/slide4.xml><?xml version="1.0" encoding="utf-8"?>
 <p:sld xmlns:a="http://schemas.openxmlformats.org/drawingml/2006/main" xmlns:r="http://schemas.openxmlformats.org/officeDocument/2006/relationships" xmlns:p="http://schemas.openxmlformats.org/presentationml/2006/main">
   <p:cSld>
     <p:spTree>
@@ -6304,10 +6761,17 @@
   <p:clrMapOvr>
     <a:masterClrMapping/>
   </p:clrMapOvr>
+  <p:timing>
+    <p:tnLst>
+      <p:par>
+        <p:cTn id="1" dur="indefinite" restart="never" nodeType="tmRoot"/>
+      </p:par>
+    </p:tnLst>
+  </p:timing>
 </p:sld>
 </file>
 
-<file path=ppt/slides/slide4.xml><?xml version="1.0" encoding="utf-8"?>
+<file path=ppt/slides/slide5.xml><?xml version="1.0" encoding="utf-8"?>
 <p:sld xmlns:a="http://schemas.openxmlformats.org/drawingml/2006/main" xmlns:r="http://schemas.openxmlformats.org/officeDocument/2006/relationships" xmlns:p="http://schemas.openxmlformats.org/presentationml/2006/main">
   <p:cSld>
     <p:spTree>
@@ -6465,7 +6929,7 @@
 </p:sld>
 </file>
 
-<file path=ppt/slides/slide5.xml><?xml version="1.0" encoding="utf-8"?>
+<file path=ppt/slides/slide6.xml><?xml version="1.0" encoding="utf-8"?>
 <p:sld xmlns:a="http://schemas.openxmlformats.org/drawingml/2006/main" xmlns:r="http://schemas.openxmlformats.org/officeDocument/2006/relationships" xmlns:p="http://schemas.openxmlformats.org/presentationml/2006/main">
   <p:cSld>
     <p:spTree>
@@ -6564,7 +7028,90 @@
 </p:sld>
 </file>
 
-<file path=ppt/slides/slide6.xml><?xml version="1.0" encoding="utf-8"?>
+<file path=ppt/slides/slide7.xml><?xml version="1.0" encoding="utf-8"?>
+<p:sld xmlns:a="http://schemas.openxmlformats.org/drawingml/2006/main" xmlns:r="http://schemas.openxmlformats.org/officeDocument/2006/relationships" xmlns:p="http://schemas.openxmlformats.org/presentationml/2006/main">
+  <p:cSld>
+    <p:spTree>
+      <p:nvGrpSpPr>
+        <p:cNvPr id="1" name=""/>
+        <p:cNvGrpSpPr/>
+        <p:nvPr/>
+      </p:nvGrpSpPr>
+      <p:grpSpPr>
+        <a:xfrm>
+          <a:off x="0" y="0"/>
+          <a:ext cx="0" cy="0"/>
+          <a:chOff x="0" y="0"/>
+          <a:chExt cx="0" cy="0"/>
+        </a:xfrm>
+      </p:grpSpPr>
+      <p:sp>
+        <p:nvSpPr>
+          <p:cNvPr id="2" name="제목 1"/>
+          <p:cNvSpPr>
+            <a:spLocks noGrp="1"/>
+          </p:cNvSpPr>
+          <p:nvPr>
+            <p:ph type="title"/>
+          </p:nvPr>
+        </p:nvSpPr>
+        <p:spPr/>
+        <p:txBody>
+          <a:bodyPr/>
+          <a:lstStyle/>
+          <a:p>
+            <a:r>
+              <a:rPr lang="en-US" altLang="ko-KR" dirty="0"/>
+              <a:t>CMOS NOR </a:t>
+            </a:r>
+            <a:r>
+              <a:rPr lang="en-US" altLang="ko-KR" dirty="0" smtClean="0"/>
+              <a:t>gate-Layout</a:t>
+            </a:r>
+            <a:endParaRPr lang="ko-KR" altLang="en-US" dirty="0"/>
+          </a:p>
+        </p:txBody>
+      </p:sp>
+      <p:pic>
+        <p:nvPicPr>
+          <p:cNvPr id="4" name="내용 개체 틀 3"/>
+          <p:cNvPicPr>
+            <a:picLocks noGrp="1" noChangeAspect="1"/>
+          </p:cNvPicPr>
+          <p:nvPr>
+            <p:ph idx="1"/>
+          </p:nvPr>
+        </p:nvPicPr>
+        <p:blipFill>
+          <a:blip r:embed="rId2"/>
+          <a:stretch>
+            <a:fillRect/>
+          </a:stretch>
+        </p:blipFill>
+        <p:spPr>
+          <a:xfrm>
+            <a:off x="838200" y="1825625"/>
+            <a:ext cx="10515600" cy="4351338"/>
+          </a:xfrm>
+          <a:prstGeom prst="rect">
+            <a:avLst/>
+          </a:prstGeom>
+        </p:spPr>
+      </p:pic>
+    </p:spTree>
+    <p:extLst>
+      <p:ext uri="{BB962C8B-B14F-4D97-AF65-F5344CB8AC3E}">
+        <p14:creationId xmlns:p14="http://schemas.microsoft.com/office/powerpoint/2010/main" val="1960490173"/>
+      </p:ext>
+    </p:extLst>
+  </p:cSld>
+  <p:clrMapOvr>
+    <a:masterClrMapping/>
+  </p:clrMapOvr>
+</p:sld>
+</file>
+
+<file path=ppt/slides/slide8.xml><?xml version="1.0" encoding="utf-8"?>
 <p:sld xmlns:a="http://schemas.openxmlformats.org/drawingml/2006/main" xmlns:r="http://schemas.openxmlformats.org/officeDocument/2006/relationships" xmlns:p="http://schemas.openxmlformats.org/presentationml/2006/main">
   <p:cSld>
     <p:spTree>
@@ -6663,279 +7210,6 @@
 </p:sld>
 </file>
 
-<file path=ppt/slides/slide7.xml><?xml version="1.0" encoding="utf-8"?>
-<p:sld xmlns:a="http://schemas.openxmlformats.org/drawingml/2006/main" xmlns:r="http://schemas.openxmlformats.org/officeDocument/2006/relationships" xmlns:p="http://schemas.openxmlformats.org/presentationml/2006/main">
-  <p:cSld>
-    <p:spTree>
-      <p:nvGrpSpPr>
-        <p:cNvPr id="1" name=""/>
-        <p:cNvGrpSpPr/>
-        <p:nvPr/>
-      </p:nvGrpSpPr>
-      <p:grpSpPr>
-        <a:xfrm>
-          <a:off x="0" y="0"/>
-          <a:ext cx="0" cy="0"/>
-          <a:chOff x="0" y="0"/>
-          <a:chExt cx="0" cy="0"/>
-        </a:xfrm>
-      </p:grpSpPr>
-      <p:sp>
-        <p:nvSpPr>
-          <p:cNvPr id="2" name="제목 1"/>
-          <p:cNvSpPr>
-            <a:spLocks noGrp="1"/>
-          </p:cNvSpPr>
-          <p:nvPr>
-            <p:ph type="title"/>
-          </p:nvPr>
-        </p:nvSpPr>
-        <p:spPr/>
-        <p:txBody>
-          <a:bodyPr/>
-          <a:lstStyle/>
-          <a:p>
-            <a:r>
-              <a:rPr lang="en-US" altLang="ko-KR" dirty="0"/>
-              <a:t>CMOS NOR gate</a:t>
-            </a:r>
-            <a:r>
-              <a:rPr lang="ko-KR" altLang="en-US" dirty="0"/>
-              <a:t>의 특징</a:t>
-            </a:r>
-          </a:p>
-        </p:txBody>
-      </p:sp>
-      <p:sp>
-        <p:nvSpPr>
-          <p:cNvPr id="3" name="내용 개체 틀 2"/>
-          <p:cNvSpPr>
-            <a:spLocks noGrp="1"/>
-          </p:cNvSpPr>
-          <p:nvPr>
-            <p:ph idx="1"/>
-          </p:nvPr>
-        </p:nvSpPr>
-        <p:spPr/>
-        <p:txBody>
-          <a:bodyPr/>
-          <a:lstStyle/>
-          <a:p>
-            <a:r>
-              <a:rPr lang="ko-KR" altLang="en-US" b="1" dirty="0"/>
-              <a:t>첫 번째 그래프</a:t>
-            </a:r>
-            <a:r>
-              <a:rPr lang="en-US" altLang="ko-KR" b="1" dirty="0"/>
-              <a:t>(OUT)</a:t>
-            </a:r>
-            <a:r>
-              <a:rPr lang="en-US" altLang="ko-KR" dirty="0"/>
-              <a:t>: </a:t>
-            </a:r>
-            <a:r>
-              <a:rPr lang="ko-KR" altLang="en-US" dirty="0"/>
-              <a:t>디지털 파형</a:t>
-            </a:r>
-            <a:r>
-              <a:rPr lang="en-US" altLang="ko-KR" dirty="0"/>
-              <a:t>, 0 ↔ 1.2V</a:t>
-            </a:r>
-            <a:r>
-              <a:rPr lang="ko-KR" altLang="en-US"/>
-              <a:t>로 변화를 반복</a:t>
-            </a:r>
-            <a:endParaRPr lang="ko-KR" altLang="en-US" dirty="0"/>
-          </a:p>
-          <a:p>
-            <a:r>
-              <a:rPr lang="ko-KR" altLang="en-US" b="1" dirty="0"/>
-              <a:t>두 번째 그래프</a:t>
-            </a:r>
-            <a:r>
-              <a:rPr lang="en-US" altLang="ko-KR" b="1" dirty="0"/>
-              <a:t>(B)</a:t>
-            </a:r>
-            <a:r>
-              <a:rPr lang="en-US" altLang="ko-KR" dirty="0"/>
-              <a:t>: A</a:t>
-            </a:r>
-            <a:r>
-              <a:rPr lang="ko-KR" altLang="en-US" dirty="0"/>
-              <a:t>와는 시점이 다른 디지털 파형</a:t>
-            </a:r>
-          </a:p>
-          <a:p>
-            <a:r>
-              <a:rPr lang="ko-KR" altLang="en-US" b="1" dirty="0"/>
-              <a:t>세 번째 그래프</a:t>
-            </a:r>
-            <a:r>
-              <a:rPr lang="en-US" altLang="ko-KR" b="1" dirty="0"/>
-              <a:t>(A)</a:t>
-            </a:r>
-            <a:r>
-              <a:rPr lang="en-US" altLang="ko-KR" dirty="0"/>
-              <a:t>: NOR </a:t>
-            </a:r>
-            <a:r>
-              <a:rPr lang="ko-KR" altLang="en-US" dirty="0"/>
-              <a:t>게이트의 출력 신호</a:t>
-            </a:r>
-            <a:endParaRPr lang="en-US" altLang="ko-KR" dirty="0"/>
-          </a:p>
-          <a:p>
-            <a:endParaRPr lang="ko-KR" altLang="en-US" dirty="0"/>
-          </a:p>
-        </p:txBody>
-      </p:sp>
-    </p:spTree>
-    <p:extLst>
-      <p:ext uri="{BB962C8B-B14F-4D97-AF65-F5344CB8AC3E}">
-        <p14:creationId xmlns:p14="http://schemas.microsoft.com/office/powerpoint/2010/main" val="3884393377"/>
-      </p:ext>
-    </p:extLst>
-  </p:cSld>
-  <p:clrMapOvr>
-    <a:masterClrMapping/>
-  </p:clrMapOvr>
-</p:sld>
-</file>
-
-<file path=ppt/slides/slide8.xml><?xml version="1.0" encoding="utf-8"?>
-<p:sld xmlns:a="http://schemas.openxmlformats.org/drawingml/2006/main" xmlns:r="http://schemas.openxmlformats.org/officeDocument/2006/relationships" xmlns:p="http://schemas.openxmlformats.org/presentationml/2006/main">
-  <p:cSld>
-    <p:spTree>
-      <p:nvGrpSpPr>
-        <p:cNvPr id="1" name=""/>
-        <p:cNvGrpSpPr/>
-        <p:nvPr/>
-      </p:nvGrpSpPr>
-      <p:grpSpPr>
-        <a:xfrm>
-          <a:off x="0" y="0"/>
-          <a:ext cx="0" cy="0"/>
-          <a:chOff x="0" y="0"/>
-          <a:chExt cx="0" cy="0"/>
-        </a:xfrm>
-      </p:grpSpPr>
-      <p:sp>
-        <p:nvSpPr>
-          <p:cNvPr id="2" name="제목 1"/>
-          <p:cNvSpPr>
-            <a:spLocks noGrp="1"/>
-          </p:cNvSpPr>
-          <p:nvPr>
-            <p:ph type="title"/>
-          </p:nvPr>
-        </p:nvSpPr>
-        <p:spPr/>
-        <p:txBody>
-          <a:bodyPr/>
-          <a:lstStyle/>
-          <a:p>
-            <a:r>
-              <a:rPr lang="en-US" altLang="ko-KR" dirty="0"/>
-              <a:t>CMOS-</a:t>
-            </a:r>
-            <a:r>
-              <a:rPr lang="ko-KR" altLang="en-US" dirty="0" err="1"/>
-              <a:t>동작점</a:t>
-            </a:r>
-            <a:endParaRPr lang="ko-KR" altLang="en-US" dirty="0"/>
-          </a:p>
-        </p:txBody>
-      </p:sp>
-      <p:sp>
-        <p:nvSpPr>
-          <p:cNvPr id="3" name="내용 개체 틀 2"/>
-          <p:cNvSpPr>
-            <a:spLocks noGrp="1"/>
-          </p:cNvSpPr>
-          <p:nvPr>
-            <p:ph idx="1"/>
-          </p:nvPr>
-        </p:nvSpPr>
-        <p:spPr/>
-        <p:txBody>
-          <a:bodyPr/>
-          <a:lstStyle/>
-          <a:p>
-            <a:r>
-              <a:rPr lang="en-US" altLang="ko-KR" dirty="0"/>
-              <a:t>CMOS </a:t>
-            </a:r>
-            <a:r>
-              <a:rPr lang="ko-KR" altLang="en-US" dirty="0"/>
-              <a:t>회로에서 동작점이란</a:t>
-            </a:r>
-            <a:r>
-              <a:rPr lang="en-US" altLang="ko-KR" dirty="0"/>
-              <a:t>, DC </a:t>
-            </a:r>
-            <a:r>
-              <a:rPr lang="ko-KR" altLang="en-US" dirty="0"/>
-              <a:t>바이어스에서 전압</a:t>
-            </a:r>
-            <a:r>
-              <a:rPr lang="en-US" altLang="ko-KR" dirty="0"/>
-              <a:t>, </a:t>
-            </a:r>
-            <a:r>
-              <a:rPr lang="ko-KR" altLang="en-US" dirty="0"/>
-              <a:t>전류가 안정되어 있는 상태를 나타내는 지점을 의미한다</a:t>
-            </a:r>
-            <a:r>
-              <a:rPr lang="en-US" altLang="ko-KR" dirty="0"/>
-              <a:t>.</a:t>
-            </a:r>
-          </a:p>
-          <a:p>
-            <a:r>
-              <a:rPr lang="ko-KR" altLang="en-US" dirty="0"/>
-              <a:t>회로 내 동작점은 회로의 안정성</a:t>
-            </a:r>
-            <a:r>
-              <a:rPr lang="en-US" altLang="ko-KR" dirty="0"/>
-              <a:t>, </a:t>
-            </a:r>
-            <a:r>
-              <a:rPr lang="ko-KR" altLang="en-US" dirty="0"/>
-              <a:t>증폭 기능 작동 여부</a:t>
-            </a:r>
-            <a:r>
-              <a:rPr lang="en-US" altLang="ko-KR" dirty="0"/>
-              <a:t>, </a:t>
-            </a:r>
-            <a:r>
-              <a:rPr lang="ko-KR" altLang="en-US" dirty="0" err="1"/>
-              <a:t>스위칭</a:t>
-            </a:r>
-            <a:r>
-              <a:rPr lang="ko-KR" altLang="en-US" dirty="0"/>
-              <a:t> 능력을 판단하는 데 중요한 역할을 한다</a:t>
-            </a:r>
-            <a:r>
-              <a:rPr lang="en-US" altLang="ko-KR" dirty="0"/>
-              <a:t>.</a:t>
-            </a:r>
-            <a:endParaRPr lang="ko-KR" altLang="en-US" dirty="0"/>
-          </a:p>
-        </p:txBody>
-      </p:sp>
-    </p:spTree>
-    <p:extLst>
-      <p:ext uri="{BB962C8B-B14F-4D97-AF65-F5344CB8AC3E}">
-        <p14:creationId xmlns:p14="http://schemas.microsoft.com/office/powerpoint/2010/main" val="3765166383"/>
-      </p:ext>
-    </p:extLst>
-  </p:cSld>
-  <p:clrMapOvr>
-    <a:masterClrMapping/>
-  </p:clrMapOvr>
-</p:sld>
-</file>
-
 <file path=ppt/slides/slide9.xml><?xml version="1.0" encoding="utf-8"?>
 <p:sld xmlns:a="http://schemas.openxmlformats.org/drawingml/2006/main" xmlns:r="http://schemas.openxmlformats.org/officeDocument/2006/relationships" xmlns:p="http://schemas.openxmlformats.org/presentationml/2006/main">
   <p:cSld>
@@ -6970,19 +7244,11 @@
           <a:p>
             <a:r>
               <a:rPr lang="en-US" altLang="ko-KR" dirty="0"/>
-              <a:t>CMOS</a:t>
-            </a:r>
-            <a:r>
-              <a:rPr lang="ko-KR" altLang="en-US" dirty="0"/>
-              <a:t>에서 </a:t>
-            </a:r>
-            <a:r>
-              <a:rPr lang="ko-KR" altLang="en-US" dirty="0" err="1"/>
-              <a:t>동작점을</a:t>
-            </a:r>
-            <a:r>
-              <a:rPr lang="ko-KR" altLang="en-US" dirty="0"/>
-              <a:t> 먼저 확인하는 이유</a:t>
+              <a:t>CMOS NOR gate</a:t>
+            </a:r>
+            <a:r>
+              <a:rPr lang="ko-KR" altLang="en-US" dirty="0"/>
+              <a:t>의 특징</a:t>
             </a:r>
           </a:p>
         </p:txBody>
@@ -6999,165 +7265,81 @@
         </p:nvSpPr>
         <p:spPr/>
         <p:txBody>
-          <a:bodyPr>
-            <a:normAutofit/>
-          </a:bodyPr>
-          <a:lstStyle/>
-          <a:p>
-            <a:r>
-              <a:rPr lang="en-US" altLang="ko-KR" sz="2000" dirty="0"/>
-              <a:t>CMOS </a:t>
-            </a:r>
-            <a:r>
-              <a:rPr lang="ko-KR" altLang="en-US" sz="2000" dirty="0"/>
-              <a:t>회로에서 </a:t>
-            </a:r>
-            <a:r>
-              <a:rPr lang="ko-KR" altLang="en-US" sz="2000" dirty="0" err="1"/>
-              <a:t>동작점을</a:t>
-            </a:r>
-            <a:r>
-              <a:rPr lang="ko-KR" altLang="en-US" sz="2000" dirty="0"/>
-              <a:t> 먼저 확인하고 시뮬레이션을 진행하는 이유는 </a:t>
-            </a:r>
-            <a:r>
-              <a:rPr lang="ko-KR" altLang="en-US" sz="2000" dirty="0" err="1"/>
-              <a:t>동작점이</a:t>
-            </a:r>
-            <a:r>
-              <a:rPr lang="ko-KR" altLang="en-US" sz="2000" dirty="0"/>
-              <a:t> 회로의 정상적인 동작을 이해하고 분석하는 데 중요한 역할을 하기 때문이다</a:t>
-            </a:r>
-            <a:r>
-              <a:rPr lang="en-US" altLang="ko-KR" sz="2000" dirty="0"/>
-              <a:t>.</a:t>
-            </a:r>
-          </a:p>
-          <a:p>
-            <a:r>
-              <a:rPr lang="en-US" altLang="ko-KR" sz="2000" dirty="0"/>
-              <a:t>CMOS </a:t>
-            </a:r>
-            <a:r>
-              <a:rPr lang="ko-KR" altLang="en-US" sz="2000" dirty="0"/>
-              <a:t>트랜지스터는 크게 세 가지 동작 영역</a:t>
-            </a:r>
-            <a:r>
-              <a:rPr lang="en-US" altLang="ko-KR" sz="2000" dirty="0"/>
-              <a:t>(</a:t>
-            </a:r>
-            <a:r>
-              <a:rPr lang="ko-KR" altLang="en-US" sz="2000" dirty="0"/>
-              <a:t>차단 영역</a:t>
-            </a:r>
-            <a:r>
-              <a:rPr lang="en-US" altLang="ko-KR" sz="2000" dirty="0"/>
-              <a:t>, </a:t>
-            </a:r>
-            <a:r>
-              <a:rPr lang="ko-KR" altLang="en-US" sz="2000" dirty="0"/>
-              <a:t>선형 영역</a:t>
-            </a:r>
-            <a:r>
-              <a:rPr lang="en-US" altLang="ko-KR" sz="2000" dirty="0"/>
-              <a:t>, </a:t>
-            </a:r>
-            <a:r>
-              <a:rPr lang="ko-KR" altLang="en-US" sz="2000" dirty="0"/>
-              <a:t>포화 영역</a:t>
-            </a:r>
-            <a:r>
-              <a:rPr lang="en-US" altLang="ko-KR" sz="2000" dirty="0"/>
-              <a:t>)</a:t>
-            </a:r>
-            <a:r>
-              <a:rPr lang="ko-KR" altLang="en-US" sz="2000" dirty="0"/>
-              <a:t>으로 나눠지며</a:t>
-            </a:r>
-            <a:r>
-              <a:rPr lang="en-US" altLang="ko-KR" sz="2000" dirty="0"/>
-              <a:t>, </a:t>
-            </a:r>
-            <a:r>
-              <a:rPr lang="ko-KR" altLang="en-US" sz="2000" dirty="0"/>
-              <a:t>각 트랜지스터가 어떤 영역에서 동작하는지 파악하는 것이 중요하다</a:t>
-            </a:r>
-            <a:r>
-              <a:rPr lang="en-US" altLang="ko-KR" sz="2000" dirty="0"/>
-              <a:t>. </a:t>
-            </a:r>
-            <a:r>
-              <a:rPr lang="ko-KR" altLang="en-US" sz="2000" dirty="0" err="1"/>
-              <a:t>동작점을</a:t>
-            </a:r>
-            <a:r>
-              <a:rPr lang="ko-KR" altLang="en-US" sz="2000" dirty="0"/>
-              <a:t> 확인하면 트랜지스터가 의도한 대로 작동하는지 확인할 수 있다</a:t>
-            </a:r>
-            <a:r>
-              <a:rPr lang="en-US" altLang="ko-KR" sz="2000" dirty="0"/>
-              <a:t>.</a:t>
-            </a:r>
-          </a:p>
-          <a:p>
-            <a:r>
-              <a:rPr lang="en-US" altLang="ko-KR" sz="2000" dirty="0"/>
-              <a:t>CMOS </a:t>
-            </a:r>
-            <a:r>
-              <a:rPr lang="ko-KR" altLang="en-US" sz="2000" dirty="0"/>
-              <a:t>회로에서 트랜지스터는 일반적으로 바이어스 전압을 통해 특정 </a:t>
-            </a:r>
-            <a:r>
-              <a:rPr lang="ko-KR" altLang="en-US" sz="2000" dirty="0" err="1"/>
-              <a:t>동작점을</a:t>
-            </a:r>
-            <a:r>
-              <a:rPr lang="ko-KR" altLang="en-US" sz="2000" dirty="0"/>
-              <a:t> 설정한다</a:t>
-            </a:r>
-            <a:r>
-              <a:rPr lang="en-US" altLang="ko-KR" sz="2000" dirty="0"/>
-              <a:t>.. </a:t>
-            </a:r>
-            <a:r>
-              <a:rPr lang="ko-KR" altLang="en-US" sz="2000" dirty="0"/>
-              <a:t>바이어스가 적절히 설정되지 않으면 회로가 제대로 동작하지 않거나</a:t>
-            </a:r>
-            <a:r>
-              <a:rPr lang="en-US" altLang="ko-KR" sz="2000" dirty="0"/>
-              <a:t>, </a:t>
-            </a:r>
-            <a:r>
-              <a:rPr lang="ko-KR" altLang="en-US" sz="2000" dirty="0"/>
-              <a:t>왜곡이 발생할 수 있기 때문에</a:t>
-            </a:r>
-            <a:r>
-              <a:rPr lang="en-US" altLang="ko-KR" sz="2000" dirty="0"/>
-              <a:t> </a:t>
-            </a:r>
-            <a:r>
-              <a:rPr lang="ko-KR" altLang="en-US" sz="2000" dirty="0" err="1"/>
-              <a:t>동작점을</a:t>
-            </a:r>
-            <a:r>
-              <a:rPr lang="ko-KR" altLang="en-US" sz="2000" dirty="0"/>
-              <a:t> 확인하여 바이어스 전압이 적절한지 검증하는 것이 중요하다</a:t>
-            </a:r>
-            <a:r>
-              <a:rPr lang="en-US" altLang="ko-KR" sz="2000" dirty="0"/>
-              <a:t>.</a:t>
-            </a:r>
-          </a:p>
-          <a:p>
-            <a:endParaRPr lang="ko-KR" altLang="en-US" sz="1600" dirty="0"/>
+          <a:bodyPr/>
+          <a:lstStyle/>
+          <a:p>
+            <a:r>
+              <a:rPr lang="ko-KR" altLang="en-US" b="1" dirty="0"/>
+              <a:t>첫 번째 그래프</a:t>
+            </a:r>
+            <a:r>
+              <a:rPr lang="en-US" altLang="ko-KR" b="1" dirty="0"/>
+              <a:t>(OUT)</a:t>
+            </a:r>
+            <a:r>
+              <a:rPr lang="en-US" altLang="ko-KR" dirty="0"/>
+              <a:t>: </a:t>
+            </a:r>
+            <a:r>
+              <a:rPr lang="ko-KR" altLang="en-US" dirty="0"/>
+              <a:t>디지털 파형</a:t>
+            </a:r>
+            <a:r>
+              <a:rPr lang="en-US" altLang="ko-KR" dirty="0"/>
+              <a:t>, 0 ↔ 1.2V</a:t>
+            </a:r>
+            <a:r>
+              <a:rPr lang="ko-KR" altLang="en-US"/>
+              <a:t>로 변화를 반복</a:t>
+            </a:r>
+            <a:endParaRPr lang="ko-KR" altLang="en-US" dirty="0"/>
+          </a:p>
+          <a:p>
+            <a:r>
+              <a:rPr lang="ko-KR" altLang="en-US" b="1" dirty="0"/>
+              <a:t>두 번째 그래프</a:t>
+            </a:r>
+            <a:r>
+              <a:rPr lang="en-US" altLang="ko-KR" b="1" dirty="0"/>
+              <a:t>(B)</a:t>
+            </a:r>
+            <a:r>
+              <a:rPr lang="en-US" altLang="ko-KR" dirty="0"/>
+              <a:t>: A</a:t>
+            </a:r>
+            <a:r>
+              <a:rPr lang="ko-KR" altLang="en-US" dirty="0"/>
+              <a:t>와는 시점이 다른 디지털 파형</a:t>
+            </a:r>
+          </a:p>
+          <a:p>
+            <a:r>
+              <a:rPr lang="ko-KR" altLang="en-US" b="1" dirty="0"/>
+              <a:t>세 번째 그래프</a:t>
+            </a:r>
+            <a:r>
+              <a:rPr lang="en-US" altLang="ko-KR" b="1" dirty="0"/>
+              <a:t>(A)</a:t>
+            </a:r>
+            <a:r>
+              <a:rPr lang="en-US" altLang="ko-KR" dirty="0"/>
+              <a:t>: NOR </a:t>
+            </a:r>
+            <a:r>
+              <a:rPr lang="ko-KR" altLang="en-US" dirty="0"/>
+              <a:t>게이트의 출력 신호</a:t>
+            </a:r>
+            <a:endParaRPr lang="en-US" altLang="ko-KR" dirty="0"/>
+          </a:p>
+          <a:p>
+            <a:endParaRPr lang="ko-KR" altLang="en-US" dirty="0"/>
           </a:p>
         </p:txBody>
       </p:sp>
     </p:spTree>
     <p:extLst>
       <p:ext uri="{BB962C8B-B14F-4D97-AF65-F5344CB8AC3E}">
-        <p14:creationId xmlns:p14="http://schemas.microsoft.com/office/powerpoint/2010/main" val="2727140261"/>
+        <p14:creationId xmlns:p14="http://schemas.microsoft.com/office/powerpoint/2010/main" val="3884393377"/>
       </p:ext>
     </p:extLst>
   </p:cSld>
